--- a/public/lessons/year-6-maths/summer/week-26/use-vertically-opposite-angles/teaching-powerpoint-v1.pptx
+++ b/public/lessons/year-6-maths/summer/week-26/use-vertically-opposite-angles/teaching-powerpoint-v1.pptx
@@ -2,24 +2,24 @@
 <file path=ppt/presentation.xml><?xml version="1.0" encoding="utf-8"?>
 <p:presentation xmlns:p="http://schemas.openxmlformats.org/presentationml/2006/main">
   <p:sldMasterIdLst>
-    <p:sldMasterId xmlns:r="http://schemas.openxmlformats.org/officeDocument/2006/relationships" id="2147483648" r:id="Rd0ea926a07eb4529"/>
+    <p:sldMasterId xmlns:r="http://schemas.openxmlformats.org/officeDocument/2006/relationships" id="2147483648" r:id="Rcb0d5db46c324f32"/>
   </p:sldMasterIdLst>
   <p:notesMasterIdLst>
-    <p:notesMasterId xmlns:r="http://schemas.openxmlformats.org/officeDocument/2006/relationships" r:id="Rb681cd5e03654a57"/>
+    <p:notesMasterId xmlns:r="http://schemas.openxmlformats.org/officeDocument/2006/relationships" r:id="R4e46404417a64672"/>
   </p:notesMasterIdLst>
   <p:sldIdLst>
-    <p:sldId xmlns:r="http://schemas.openxmlformats.org/officeDocument/2006/relationships" id="256" r:id="R18bb6b037ec240e9"/>
-    <p:sldId xmlns:r="http://schemas.openxmlformats.org/officeDocument/2006/relationships" id="257" r:id="Rc2190d6e446d405b"/>
-    <p:sldId xmlns:r="http://schemas.openxmlformats.org/officeDocument/2006/relationships" id="258" r:id="R0d79073446454933"/>
-    <p:sldId xmlns:r="http://schemas.openxmlformats.org/officeDocument/2006/relationships" id="259" r:id="R60854f2096e94642"/>
-    <p:sldId xmlns:r="http://schemas.openxmlformats.org/officeDocument/2006/relationships" id="260" r:id="R1dd8a3a6e555459c"/>
-    <p:sldId xmlns:r="http://schemas.openxmlformats.org/officeDocument/2006/relationships" id="261" r:id="R7fbee3d5107a478f"/>
-    <p:sldId xmlns:r="http://schemas.openxmlformats.org/officeDocument/2006/relationships" id="262" r:id="R3327a87a187442e2"/>
-    <p:sldId xmlns:r="http://schemas.openxmlformats.org/officeDocument/2006/relationships" id="263" r:id="R155c1c721c84480e"/>
-    <p:sldId xmlns:r="http://schemas.openxmlformats.org/officeDocument/2006/relationships" id="264" r:id="R68faea834c704329"/>
-    <p:sldId xmlns:r="http://schemas.openxmlformats.org/officeDocument/2006/relationships" id="265" r:id="R7b45678071204a9b"/>
-    <p:sldId xmlns:r="http://schemas.openxmlformats.org/officeDocument/2006/relationships" id="266" r:id="Rb0ae539f1d93420a"/>
-    <p:sldId xmlns:r="http://schemas.openxmlformats.org/officeDocument/2006/relationships" id="267" r:id="Red05f9d84c2042e2"/>
+    <p:sldId xmlns:r="http://schemas.openxmlformats.org/officeDocument/2006/relationships" id="256" r:id="Ra4d36900b255477b"/>
+    <p:sldId xmlns:r="http://schemas.openxmlformats.org/officeDocument/2006/relationships" id="257" r:id="R730750cc053f4b8c"/>
+    <p:sldId xmlns:r="http://schemas.openxmlformats.org/officeDocument/2006/relationships" id="258" r:id="R6bd14564333844d0"/>
+    <p:sldId xmlns:r="http://schemas.openxmlformats.org/officeDocument/2006/relationships" id="259" r:id="Rbf78251173334ea7"/>
+    <p:sldId xmlns:r="http://schemas.openxmlformats.org/officeDocument/2006/relationships" id="260" r:id="Re09db7080f1d4e89"/>
+    <p:sldId xmlns:r="http://schemas.openxmlformats.org/officeDocument/2006/relationships" id="261" r:id="R0a0f92db45544d35"/>
+    <p:sldId xmlns:r="http://schemas.openxmlformats.org/officeDocument/2006/relationships" id="262" r:id="R5fd8eddd23194c1a"/>
+    <p:sldId xmlns:r="http://schemas.openxmlformats.org/officeDocument/2006/relationships" id="263" r:id="R24c39a8d74604c0f"/>
+    <p:sldId xmlns:r="http://schemas.openxmlformats.org/officeDocument/2006/relationships" id="264" r:id="R2c1bdd1c92034c6f"/>
+    <p:sldId xmlns:r="http://schemas.openxmlformats.org/officeDocument/2006/relationships" id="265" r:id="Rfb4c2ce2111a4b19"/>
+    <p:sldId xmlns:r="http://schemas.openxmlformats.org/officeDocument/2006/relationships" id="266" r:id="Rb8024dae7cf0421c"/>
+    <p:sldId xmlns:r="http://schemas.openxmlformats.org/officeDocument/2006/relationships" id="267" r:id="R0778ded794724c2c"/>
   </p:sldIdLst>
   <p:sldSz cx="12192000" cy="6858000"/>
   <p:notesSz cx="6858000" cy="9144000"/>
@@ -873,7 +873,7 @@
           <a:lstStyle xmlns:a="http://schemas.openxmlformats.org/drawingml/2006/main"/>
           <a:p xmlns:a="http://schemas.openxmlformats.org/drawingml/2006/main">
             <a:r>
-              <a:t>I do. Reveal the question, setup and each calculation stage one click at a time. Pupils watch before copying. Model answer: 68 degrees.</a:t>
+              <a:t>I do. Reveal the question, then reveal each mathematical change one click at a time. Point to the numbers and operation that changed before moving to the next line. Final answer: 68 degrees.</a:t>
             </a:r>
           </a:p>
         </p:txBody>
@@ -1291,7 +1291,7 @@
   </p:cSld>
   <p:clrMap bg1="lt1" tx1="dk1" bg2="lt2" tx2="dk2" accent1="accent1" accent2="accent2" accent3="accent3" accent4="accent4" accent5="accent5" accent6="accent6" hlink="hlink" folHlink="folHlink"/>
   <p:sldLayoutIdLst>
-    <p:sldLayoutId xmlns:r="http://schemas.openxmlformats.org/officeDocument/2006/relationships" id="2147483649" r:id="Rc54091a60a214f3f"/>
+    <p:sldLayoutId xmlns:r="http://schemas.openxmlformats.org/officeDocument/2006/relationships" id="2147483649" r:id="R9160c3090d1147c7"/>
   </p:sldLayoutIdLst>
   <p:txStyles>
     <p:titleStyle>
@@ -1842,7 +1842,7 @@
           <p:cNvPr id="12" name="">
             <a:extLst xmlns:a="http://schemas.openxmlformats.org/drawingml/2006/main">
               <a:ext uri="{FF2B5EF4-FFF2-40B4-BE49-F238E27FC236}">
-                <a16:creationId xmlns:a16="http://schemas.microsoft.com/office/drawing/2014/main" id="{9A6FF010-7D2E-4356-AEA7-C6A318FDAA32}"/>
+                <a16:creationId xmlns:a16="http://schemas.microsoft.com/office/drawing/2014/main" id="{7076A2F6-F22F-4BD6-8F4C-F5C6C2FF95E4}"/>
               </a:ext>
             </a:extLst>
           </p:cNvPr>
@@ -1874,7 +1874,7 @@
           <p:cNvPr id="2" name="">
             <a:extLst xmlns:a="http://schemas.openxmlformats.org/drawingml/2006/main">
               <a:ext uri="{FF2B5EF4-FFF2-40B4-BE49-F238E27FC236}">
-                <a16:creationId xmlns:a16="http://schemas.microsoft.com/office/drawing/2014/main" id="{1AB3A992-3A7D-4677-8611-24DC2A35207F}"/>
+                <a16:creationId xmlns:a16="http://schemas.microsoft.com/office/drawing/2014/main" id="{88FA69EB-3090-4317-93CA-7CD088C2A5A4}"/>
               </a:ext>
             </a:extLst>
           </p:cNvPr>
@@ -1931,7 +1931,7 @@
           <p:cNvPr id="3" name="">
             <a:extLst xmlns:a="http://schemas.openxmlformats.org/drawingml/2006/main">
               <a:ext uri="{FF2B5EF4-FFF2-40B4-BE49-F238E27FC236}">
-                <a16:creationId xmlns:a16="http://schemas.microsoft.com/office/drawing/2014/main" id="{26AD3603-2FF4-4B41-9B08-74797195D075}"/>
+                <a16:creationId xmlns:a16="http://schemas.microsoft.com/office/drawing/2014/main" id="{DAEF3D52-C262-4807-A150-92353AA00C8D}"/>
               </a:ext>
             </a:extLst>
           </p:cNvPr>
@@ -1965,7 +1965,7 @@
           <p:cNvPr id="4" name="">
             <a:extLst xmlns:a="http://schemas.openxmlformats.org/drawingml/2006/main">
               <a:ext uri="{FF2B5EF4-FFF2-40B4-BE49-F238E27FC236}">
-                <a16:creationId xmlns:a16="http://schemas.microsoft.com/office/drawing/2014/main" id="{FAF613B9-915E-4A77-A1E3-773139D2743E}"/>
+                <a16:creationId xmlns:a16="http://schemas.microsoft.com/office/drawing/2014/main" id="{7B7399A6-3DBD-4840-A021-889C8DE8892F}"/>
               </a:ext>
             </a:extLst>
           </p:cNvPr>
@@ -2022,7 +2022,7 @@
           <p:cNvPr id="5" name="">
             <a:extLst xmlns:a="http://schemas.openxmlformats.org/drawingml/2006/main">
               <a:ext uri="{FF2B5EF4-FFF2-40B4-BE49-F238E27FC236}">
-                <a16:creationId xmlns:a16="http://schemas.microsoft.com/office/drawing/2014/main" id="{7D387448-4D65-4883-951B-AE11292DCB2E}"/>
+                <a16:creationId xmlns:a16="http://schemas.microsoft.com/office/drawing/2014/main" id="{5A03EB97-2B54-4E94-A3EC-847AF3310FD8}"/>
               </a:ext>
             </a:extLst>
           </p:cNvPr>
@@ -2079,7 +2079,7 @@
           <p:cNvPr id="6" name="">
             <a:extLst xmlns:a="http://schemas.openxmlformats.org/drawingml/2006/main">
               <a:ext uri="{FF2B5EF4-FFF2-40B4-BE49-F238E27FC236}">
-                <a16:creationId xmlns:a16="http://schemas.microsoft.com/office/drawing/2014/main" id="{893DA024-7BAA-4772-9BBE-C329D3E5171F}"/>
+                <a16:creationId xmlns:a16="http://schemas.microsoft.com/office/drawing/2014/main" id="{AA24F9DB-5ECC-46F2-BF25-89C9B45A2B9A}"/>
               </a:ext>
             </a:extLst>
           </p:cNvPr>
@@ -2113,7 +2113,7 @@
           <p:cNvPr id="7" name="">
             <a:extLst xmlns:a="http://schemas.openxmlformats.org/drawingml/2006/main">
               <a:ext uri="{FF2B5EF4-FFF2-40B4-BE49-F238E27FC236}">
-                <a16:creationId xmlns:a16="http://schemas.microsoft.com/office/drawing/2014/main" id="{8904A607-BDA5-40DF-ADE7-4F260FBE804F}"/>
+                <a16:creationId xmlns:a16="http://schemas.microsoft.com/office/drawing/2014/main" id="{1BA2DFCF-6E50-4124-82D9-3E29CDA57FB7}"/>
               </a:ext>
             </a:extLst>
           </p:cNvPr>
@@ -2170,7 +2170,7 @@
           <p:cNvPr id="8" name="">
             <a:extLst xmlns:a="http://schemas.openxmlformats.org/drawingml/2006/main">
               <a:ext uri="{FF2B5EF4-FFF2-40B4-BE49-F238E27FC236}">
-                <a16:creationId xmlns:a16="http://schemas.microsoft.com/office/drawing/2014/main" id="{42380E75-1B2E-4782-9EA9-0D78F5D4677D}"/>
+                <a16:creationId xmlns:a16="http://schemas.microsoft.com/office/drawing/2014/main" id="{369CB701-4FC6-47E3-9081-0A1C7D108864}"/>
               </a:ext>
             </a:extLst>
           </p:cNvPr>
@@ -2227,7 +2227,7 @@
           <p:cNvPr id="9" name="">
             <a:extLst xmlns:a="http://schemas.openxmlformats.org/drawingml/2006/main">
               <a:ext uri="{FF2B5EF4-FFF2-40B4-BE49-F238E27FC236}">
-                <a16:creationId xmlns:a16="http://schemas.microsoft.com/office/drawing/2014/main" id="{8FCF799D-1871-4A5F-949D-ED448ECE4752}"/>
+                <a16:creationId xmlns:a16="http://schemas.microsoft.com/office/drawing/2014/main" id="{D0D36550-0DAA-4563-AB86-AB5769778F72}"/>
               </a:ext>
             </a:extLst>
           </p:cNvPr>
@@ -2284,7 +2284,7 @@
           <p:cNvPr id="10" name="">
             <a:extLst xmlns:a="http://schemas.openxmlformats.org/drawingml/2006/main">
               <a:ext uri="{FF2B5EF4-FFF2-40B4-BE49-F238E27FC236}">
-                <a16:creationId xmlns:a16="http://schemas.microsoft.com/office/drawing/2014/main" id="{C9EF9F87-9327-46BF-91C9-26688C3C0D6A}"/>
+                <a16:creationId xmlns:a16="http://schemas.microsoft.com/office/drawing/2014/main" id="{E419D3FD-637D-45B1-BA4A-B3EE37FDD5ED}"/>
               </a:ext>
             </a:extLst>
           </p:cNvPr>
@@ -2341,7 +2341,7 @@
           <p:cNvPr id="11" name="">
             <a:extLst xmlns:a="http://schemas.openxmlformats.org/drawingml/2006/main">
               <a:ext uri="{FF2B5EF4-FFF2-40B4-BE49-F238E27FC236}">
-                <a16:creationId xmlns:a16="http://schemas.microsoft.com/office/drawing/2014/main" id="{CB6C2959-2BC0-4F17-B816-D85827442EC4}"/>
+                <a16:creationId xmlns:a16="http://schemas.microsoft.com/office/drawing/2014/main" id="{B4CFB07A-E04B-4D26-B352-03F396078448}"/>
               </a:ext>
             </a:extLst>
           </p:cNvPr>
@@ -2396,7 +2396,7 @@
     </p:spTree>
     <p:extLst>
       <p:ext uri="{BB962C8B-B14F-4D97-AF65-F5344CB8AC3E}">
-        <p14:creationId xmlns:p14="http://schemas.microsoft.com/office/powerpoint/2010/main" val="629190161"/>
+        <p14:creationId xmlns:p14="http://schemas.microsoft.com/office/powerpoint/2010/main" val="144120530"/>
       </p:ext>
     </p:extLst>
   </p:cSld>
@@ -2427,7 +2427,7 @@
           <p:cNvPr id="14" name="">
             <a:extLst xmlns:a="http://schemas.openxmlformats.org/drawingml/2006/main">
               <a:ext uri="{FF2B5EF4-FFF2-40B4-BE49-F238E27FC236}">
-                <a16:creationId xmlns:a16="http://schemas.microsoft.com/office/drawing/2014/main" id="{773B9DBD-9F1F-4157-A777-C995CA2B8E3C}"/>
+                <a16:creationId xmlns:a16="http://schemas.microsoft.com/office/drawing/2014/main" id="{5814434F-F415-4587-A951-8C480D06AD47}"/>
               </a:ext>
             </a:extLst>
           </p:cNvPr>
@@ -2459,7 +2459,7 @@
           <p:cNvPr id="2" name="">
             <a:extLst xmlns:a="http://schemas.openxmlformats.org/drawingml/2006/main">
               <a:ext uri="{FF2B5EF4-FFF2-40B4-BE49-F238E27FC236}">
-                <a16:creationId xmlns:a16="http://schemas.microsoft.com/office/drawing/2014/main" id="{289431ED-2781-4DE7-888D-71D871C31ED4}"/>
+                <a16:creationId xmlns:a16="http://schemas.microsoft.com/office/drawing/2014/main" id="{DED1C025-C5BA-4C86-B5FD-8329186E71EE}"/>
               </a:ext>
             </a:extLst>
           </p:cNvPr>
@@ -2516,7 +2516,7 @@
           <p:cNvPr id="3" name="">
             <a:extLst xmlns:a="http://schemas.openxmlformats.org/drawingml/2006/main">
               <a:ext uri="{FF2B5EF4-FFF2-40B4-BE49-F238E27FC236}">
-                <a16:creationId xmlns:a16="http://schemas.microsoft.com/office/drawing/2014/main" id="{F7A89555-5E59-407C-B1F0-58BFC497FF52}"/>
+                <a16:creationId xmlns:a16="http://schemas.microsoft.com/office/drawing/2014/main" id="{1F63DB8B-5A2A-4734-B1A2-7BA45A291A1D}"/>
               </a:ext>
             </a:extLst>
           </p:cNvPr>
@@ -2548,7 +2548,7 @@
           <p:cNvPr id="4" name="">
             <a:extLst xmlns:a="http://schemas.openxmlformats.org/drawingml/2006/main">
               <a:ext uri="{FF2B5EF4-FFF2-40B4-BE49-F238E27FC236}">
-                <a16:creationId xmlns:a16="http://schemas.microsoft.com/office/drawing/2014/main" id="{EAEB746F-4AD6-47D9-9CA6-7769E6D05201}"/>
+                <a16:creationId xmlns:a16="http://schemas.microsoft.com/office/drawing/2014/main" id="{920F681A-73FB-40BA-8281-FBF2A3E34EBD}"/>
               </a:ext>
             </a:extLst>
           </p:cNvPr>
@@ -2605,7 +2605,7 @@
           <p:cNvPr id="5" name="">
             <a:extLst xmlns:a="http://schemas.openxmlformats.org/drawingml/2006/main">
               <a:ext uri="{FF2B5EF4-FFF2-40B4-BE49-F238E27FC236}">
-                <a16:creationId xmlns:a16="http://schemas.microsoft.com/office/drawing/2014/main" id="{1C7B71D0-D150-4085-BF22-FB39F8D8F467}"/>
+                <a16:creationId xmlns:a16="http://schemas.microsoft.com/office/drawing/2014/main" id="{345956B0-255C-4F62-B529-35DC4D245C04}"/>
               </a:ext>
             </a:extLst>
           </p:cNvPr>
@@ -2662,7 +2662,7 @@
           <p:cNvPr id="6" name="">
             <a:extLst xmlns:a="http://schemas.openxmlformats.org/drawingml/2006/main">
               <a:ext uri="{FF2B5EF4-FFF2-40B4-BE49-F238E27FC236}">
-                <a16:creationId xmlns:a16="http://schemas.microsoft.com/office/drawing/2014/main" id="{F3ADF17C-DC0D-4A0B-884B-271EADDEDB5F}"/>
+                <a16:creationId xmlns:a16="http://schemas.microsoft.com/office/drawing/2014/main" id="{CD828360-DE2B-4A5A-92A3-6DE4E8180076}"/>
               </a:ext>
             </a:extLst>
           </p:cNvPr>
@@ -2719,7 +2719,7 @@
           <p:cNvPr id="7" name="">
             <a:extLst xmlns:a="http://schemas.openxmlformats.org/drawingml/2006/main">
               <a:ext uri="{FF2B5EF4-FFF2-40B4-BE49-F238E27FC236}">
-                <a16:creationId xmlns:a16="http://schemas.microsoft.com/office/drawing/2014/main" id="{7265BCEB-FF61-4188-B25D-8B6685C564A9}"/>
+                <a16:creationId xmlns:a16="http://schemas.microsoft.com/office/drawing/2014/main" id="{5B0BD946-C9EB-4682-928B-D6DF50C58425}"/>
               </a:ext>
             </a:extLst>
           </p:cNvPr>
@@ -2751,7 +2751,7 @@
           <p:cNvPr id="8" name="">
             <a:extLst xmlns:a="http://schemas.openxmlformats.org/drawingml/2006/main">
               <a:ext uri="{FF2B5EF4-FFF2-40B4-BE49-F238E27FC236}">
-                <a16:creationId xmlns:a16="http://schemas.microsoft.com/office/drawing/2014/main" id="{02528239-64F2-4509-B0F4-FC4DCE0FC266}"/>
+                <a16:creationId xmlns:a16="http://schemas.microsoft.com/office/drawing/2014/main" id="{7648F89C-0911-429A-A3B4-1FFA77CDAD43}"/>
               </a:ext>
             </a:extLst>
           </p:cNvPr>
@@ -2808,7 +2808,7 @@
           <p:cNvPr id="9" name="">
             <a:extLst xmlns:a="http://schemas.openxmlformats.org/drawingml/2006/main">
               <a:ext uri="{FF2B5EF4-FFF2-40B4-BE49-F238E27FC236}">
-                <a16:creationId xmlns:a16="http://schemas.microsoft.com/office/drawing/2014/main" id="{490B0088-1A64-4A6F-99CE-3847F0B2509B}"/>
+                <a16:creationId xmlns:a16="http://schemas.microsoft.com/office/drawing/2014/main" id="{353D2E69-F4A7-4A4A-95FB-AAD7183F63F4}"/>
               </a:ext>
             </a:extLst>
           </p:cNvPr>
@@ -2865,7 +2865,7 @@
           <p:cNvPr id="10" name="">
             <a:extLst xmlns:a="http://schemas.openxmlformats.org/drawingml/2006/main">
               <a:ext uri="{FF2B5EF4-FFF2-40B4-BE49-F238E27FC236}">
-                <a16:creationId xmlns:a16="http://schemas.microsoft.com/office/drawing/2014/main" id="{D61447E0-AF3F-4BB5-971F-600E17D98EC0}"/>
+                <a16:creationId xmlns:a16="http://schemas.microsoft.com/office/drawing/2014/main" id="{331C22C9-D3C7-4AF9-A34E-45BB49AC9CF8}"/>
               </a:ext>
             </a:extLst>
           </p:cNvPr>
@@ -2922,7 +2922,7 @@
           <p:cNvPr id="11" name="">
             <a:extLst xmlns:a="http://schemas.openxmlformats.org/drawingml/2006/main">
               <a:ext uri="{FF2B5EF4-FFF2-40B4-BE49-F238E27FC236}">
-                <a16:creationId xmlns:a16="http://schemas.microsoft.com/office/drawing/2014/main" id="{46278A87-A394-410B-B9EA-D895A3317E12}"/>
+                <a16:creationId xmlns:a16="http://schemas.microsoft.com/office/drawing/2014/main" id="{FA01D3E2-68A1-4DBD-BECD-66FF777EAC44}"/>
               </a:ext>
             </a:extLst>
           </p:cNvPr>
@@ -2979,7 +2979,7 @@
           <p:cNvPr id="12" name="">
             <a:extLst xmlns:a="http://schemas.openxmlformats.org/drawingml/2006/main">
               <a:ext uri="{FF2B5EF4-FFF2-40B4-BE49-F238E27FC236}">
-                <a16:creationId xmlns:a16="http://schemas.microsoft.com/office/drawing/2014/main" id="{645A723C-AD89-43C1-8620-137988E7113F}"/>
+                <a16:creationId xmlns:a16="http://schemas.microsoft.com/office/drawing/2014/main" id="{754ADF33-5256-4450-B3AB-F9A886D73570}"/>
               </a:ext>
             </a:extLst>
           </p:cNvPr>
@@ -3036,7 +3036,7 @@
           <p:cNvPr id="13" name="">
             <a:extLst xmlns:a="http://schemas.openxmlformats.org/drawingml/2006/main">
               <a:ext uri="{FF2B5EF4-FFF2-40B4-BE49-F238E27FC236}">
-                <a16:creationId xmlns:a16="http://schemas.microsoft.com/office/drawing/2014/main" id="{9E6A90FF-4BB7-4324-B390-173C3EFBA2A3}"/>
+                <a16:creationId xmlns:a16="http://schemas.microsoft.com/office/drawing/2014/main" id="{31619187-C6B4-463D-A6DD-C269CB1D4568}"/>
               </a:ext>
             </a:extLst>
           </p:cNvPr>
@@ -3091,7 +3091,7 @@
     </p:spTree>
     <p:extLst>
       <p:ext uri="{BB962C8B-B14F-4D97-AF65-F5344CB8AC3E}">
-        <p14:creationId xmlns:p14="http://schemas.microsoft.com/office/powerpoint/2010/main" val="1119983311"/>
+        <p14:creationId xmlns:p14="http://schemas.microsoft.com/office/powerpoint/2010/main" val="1939547651"/>
       </p:ext>
     </p:extLst>
   </p:cSld>
@@ -3292,7 +3292,7 @@
           <p:cNvPr id="19" name="">
             <a:extLst xmlns:a="http://schemas.openxmlformats.org/drawingml/2006/main">
               <a:ext uri="{FF2B5EF4-FFF2-40B4-BE49-F238E27FC236}">
-                <a16:creationId xmlns:a16="http://schemas.microsoft.com/office/drawing/2014/main" id="{BC901789-B8CC-4D96-958E-A00319CBC6BB}"/>
+                <a16:creationId xmlns:a16="http://schemas.microsoft.com/office/drawing/2014/main" id="{F64590A4-AC59-4EB8-87AE-614ACD3E717F}"/>
               </a:ext>
             </a:extLst>
           </p:cNvPr>
@@ -3324,7 +3324,7 @@
           <p:cNvPr id="2" name="">
             <a:extLst xmlns:a="http://schemas.openxmlformats.org/drawingml/2006/main">
               <a:ext uri="{FF2B5EF4-FFF2-40B4-BE49-F238E27FC236}">
-                <a16:creationId xmlns:a16="http://schemas.microsoft.com/office/drawing/2014/main" id="{3DE5E8BB-939B-4649-BF76-21251312B51E}"/>
+                <a16:creationId xmlns:a16="http://schemas.microsoft.com/office/drawing/2014/main" id="{0D25402A-9C24-4B90-9AC8-DFD23E5EED74}"/>
               </a:ext>
             </a:extLst>
           </p:cNvPr>
@@ -3381,7 +3381,7 @@
           <p:cNvPr id="3" name="">
             <a:extLst xmlns:a="http://schemas.openxmlformats.org/drawingml/2006/main">
               <a:ext uri="{FF2B5EF4-FFF2-40B4-BE49-F238E27FC236}">
-                <a16:creationId xmlns:a16="http://schemas.microsoft.com/office/drawing/2014/main" id="{3D5906BE-F244-4DFD-B912-AF5B53A6D30C}"/>
+                <a16:creationId xmlns:a16="http://schemas.microsoft.com/office/drawing/2014/main" id="{9E503FE3-B385-4E5C-B7F2-107436DFC25B}"/>
               </a:ext>
             </a:extLst>
           </p:cNvPr>
@@ -3413,7 +3413,7 @@
           <p:cNvPr id="4" name="">
             <a:extLst xmlns:a="http://schemas.openxmlformats.org/drawingml/2006/main">
               <a:ext uri="{FF2B5EF4-FFF2-40B4-BE49-F238E27FC236}">
-                <a16:creationId xmlns:a16="http://schemas.microsoft.com/office/drawing/2014/main" id="{2809D63E-26A9-4CF4-A650-FF5A204F9BD7}"/>
+                <a16:creationId xmlns:a16="http://schemas.microsoft.com/office/drawing/2014/main" id="{974A618F-CF37-4D22-B155-D51605C1558C}"/>
               </a:ext>
             </a:extLst>
           </p:cNvPr>
@@ -3470,7 +3470,7 @@
           <p:cNvPr id="5" name="">
             <a:extLst xmlns:a="http://schemas.openxmlformats.org/drawingml/2006/main">
               <a:ext uri="{FF2B5EF4-FFF2-40B4-BE49-F238E27FC236}">
-                <a16:creationId xmlns:a16="http://schemas.microsoft.com/office/drawing/2014/main" id="{28F2E19D-52C7-4332-B4F2-01C08666074C}"/>
+                <a16:creationId xmlns:a16="http://schemas.microsoft.com/office/drawing/2014/main" id="{4650F165-AA0B-4CA5-8761-D88A3EA9621A}"/>
               </a:ext>
             </a:extLst>
           </p:cNvPr>
@@ -3527,7 +3527,7 @@
           <p:cNvPr id="6" name="">
             <a:extLst xmlns:a="http://schemas.openxmlformats.org/drawingml/2006/main">
               <a:ext uri="{FF2B5EF4-FFF2-40B4-BE49-F238E27FC236}">
-                <a16:creationId xmlns:a16="http://schemas.microsoft.com/office/drawing/2014/main" id="{D291DA39-2545-471F-985F-8ED9649C050E}"/>
+                <a16:creationId xmlns:a16="http://schemas.microsoft.com/office/drawing/2014/main" id="{88C32CD4-837B-4B16-A980-18F02F5F176F}"/>
               </a:ext>
             </a:extLst>
           </p:cNvPr>
@@ -3584,7 +3584,7 @@
           <p:cNvPr id="7" name="">
             <a:extLst xmlns:a="http://schemas.openxmlformats.org/drawingml/2006/main">
               <a:ext uri="{FF2B5EF4-FFF2-40B4-BE49-F238E27FC236}">
-                <a16:creationId xmlns:a16="http://schemas.microsoft.com/office/drawing/2014/main" id="{E838566D-181E-406D-B368-B13792756BD7}"/>
+                <a16:creationId xmlns:a16="http://schemas.microsoft.com/office/drawing/2014/main" id="{8DD366FF-1E3C-4B2D-829C-A491AE57FB59}"/>
               </a:ext>
             </a:extLst>
           </p:cNvPr>
@@ -3616,7 +3616,7 @@
           <p:cNvPr id="8" name="">
             <a:extLst xmlns:a="http://schemas.openxmlformats.org/drawingml/2006/main">
               <a:ext uri="{FF2B5EF4-FFF2-40B4-BE49-F238E27FC236}">
-                <a16:creationId xmlns:a16="http://schemas.microsoft.com/office/drawing/2014/main" id="{32713396-9884-4D83-B1E1-B1DCA950E660}"/>
+                <a16:creationId xmlns:a16="http://schemas.microsoft.com/office/drawing/2014/main" id="{A81A7261-B380-4BE2-A953-E76951A5B515}"/>
               </a:ext>
             </a:extLst>
           </p:cNvPr>
@@ -3673,7 +3673,7 @@
           <p:cNvPr id="9" name="">
             <a:extLst xmlns:a="http://schemas.openxmlformats.org/drawingml/2006/main">
               <a:ext uri="{FF2B5EF4-FFF2-40B4-BE49-F238E27FC236}">
-                <a16:creationId xmlns:a16="http://schemas.microsoft.com/office/drawing/2014/main" id="{7D6569BD-9DF5-4E71-8408-7F37ED9D712A}"/>
+                <a16:creationId xmlns:a16="http://schemas.microsoft.com/office/drawing/2014/main" id="{B6F77E88-0AFA-4CFE-8CE4-60A54B74195C}"/>
               </a:ext>
             </a:extLst>
           </p:cNvPr>
@@ -3730,7 +3730,7 @@
           <p:cNvPr id="10" name="">
             <a:extLst xmlns:a="http://schemas.openxmlformats.org/drawingml/2006/main">
               <a:ext uri="{FF2B5EF4-FFF2-40B4-BE49-F238E27FC236}">
-                <a16:creationId xmlns:a16="http://schemas.microsoft.com/office/drawing/2014/main" id="{1F640E61-62C9-4BAB-95BE-2DEC317A847D}"/>
+                <a16:creationId xmlns:a16="http://schemas.microsoft.com/office/drawing/2014/main" id="{D1F8765B-8428-473B-9205-B12D12982C3A}"/>
               </a:ext>
             </a:extLst>
           </p:cNvPr>
@@ -3787,7 +3787,7 @@
           <p:cNvPr id="11" name="">
             <a:extLst xmlns:a="http://schemas.openxmlformats.org/drawingml/2006/main">
               <a:ext uri="{FF2B5EF4-FFF2-40B4-BE49-F238E27FC236}">
-                <a16:creationId xmlns:a16="http://schemas.microsoft.com/office/drawing/2014/main" id="{29814DAE-A3ED-4A6C-BE1A-BBE83844889C}"/>
+                <a16:creationId xmlns:a16="http://schemas.microsoft.com/office/drawing/2014/main" id="{1749D118-7A0C-41F1-9606-28B02D69E3E3}"/>
               </a:ext>
             </a:extLst>
           </p:cNvPr>
@@ -3821,7 +3821,7 @@
           <p:cNvPr id="12" name="">
             <a:extLst xmlns:a="http://schemas.openxmlformats.org/drawingml/2006/main">
               <a:ext uri="{FF2B5EF4-FFF2-40B4-BE49-F238E27FC236}">
-                <a16:creationId xmlns:a16="http://schemas.microsoft.com/office/drawing/2014/main" id="{1AA3D2A5-CB6F-4B34-A4D6-A486FB9F7819}"/>
+                <a16:creationId xmlns:a16="http://schemas.microsoft.com/office/drawing/2014/main" id="{31E7EDD9-38F1-4DFB-B606-3F767A36D695}"/>
               </a:ext>
             </a:extLst>
           </p:cNvPr>
@@ -3878,7 +3878,7 @@
           <p:cNvPr id="13" name="">
             <a:extLst xmlns:a="http://schemas.openxmlformats.org/drawingml/2006/main">
               <a:ext uri="{FF2B5EF4-FFF2-40B4-BE49-F238E27FC236}">
-                <a16:creationId xmlns:a16="http://schemas.microsoft.com/office/drawing/2014/main" id="{C4AD25C0-5519-4602-80A6-DD12703631DB}"/>
+                <a16:creationId xmlns:a16="http://schemas.microsoft.com/office/drawing/2014/main" id="{22D320A7-FDA0-4F29-810D-D679114B10F0}"/>
               </a:ext>
             </a:extLst>
           </p:cNvPr>
@@ -3935,7 +3935,7 @@
           <p:cNvPr id="14" name="">
             <a:extLst xmlns:a="http://schemas.openxmlformats.org/drawingml/2006/main">
               <a:ext uri="{FF2B5EF4-FFF2-40B4-BE49-F238E27FC236}">
-                <a16:creationId xmlns:a16="http://schemas.microsoft.com/office/drawing/2014/main" id="{3098C629-5A69-4A67-B4C4-D4708EFA4980}"/>
+                <a16:creationId xmlns:a16="http://schemas.microsoft.com/office/drawing/2014/main" id="{B6D591DD-003C-4119-AA81-1747AAD776BC}"/>
               </a:ext>
             </a:extLst>
           </p:cNvPr>
@@ -3992,7 +3992,7 @@
           <p:cNvPr id="15" name="">
             <a:extLst xmlns:a="http://schemas.openxmlformats.org/drawingml/2006/main">
               <a:ext uri="{FF2B5EF4-FFF2-40B4-BE49-F238E27FC236}">
-                <a16:creationId xmlns:a16="http://schemas.microsoft.com/office/drawing/2014/main" id="{33F438CE-EB31-45AD-B889-9B91DA0DFF1A}"/>
+                <a16:creationId xmlns:a16="http://schemas.microsoft.com/office/drawing/2014/main" id="{9D965663-B425-4396-8B3D-B9837A7F8596}"/>
               </a:ext>
             </a:extLst>
           </p:cNvPr>
@@ -4026,7 +4026,7 @@
           <p:cNvPr id="16" name="">
             <a:extLst xmlns:a="http://schemas.openxmlformats.org/drawingml/2006/main">
               <a:ext uri="{FF2B5EF4-FFF2-40B4-BE49-F238E27FC236}">
-                <a16:creationId xmlns:a16="http://schemas.microsoft.com/office/drawing/2014/main" id="{C55AD337-D701-41F8-A17E-7D3F27A9BB73}"/>
+                <a16:creationId xmlns:a16="http://schemas.microsoft.com/office/drawing/2014/main" id="{D96774C5-A289-496F-B7D5-97828C96DF48}"/>
               </a:ext>
             </a:extLst>
           </p:cNvPr>
@@ -4083,7 +4083,7 @@
           <p:cNvPr id="17" name="">
             <a:extLst xmlns:a="http://schemas.openxmlformats.org/drawingml/2006/main">
               <a:ext uri="{FF2B5EF4-FFF2-40B4-BE49-F238E27FC236}">
-                <a16:creationId xmlns:a16="http://schemas.microsoft.com/office/drawing/2014/main" id="{8C0E85B7-2FB9-4AC9-ADA1-422BE5639529}"/>
+                <a16:creationId xmlns:a16="http://schemas.microsoft.com/office/drawing/2014/main" id="{4DBB510C-C1A2-4E91-AFE6-B45CFAD7AD64}"/>
               </a:ext>
             </a:extLst>
           </p:cNvPr>
@@ -4140,7 +4140,7 @@
           <p:cNvPr id="18" name="">
             <a:extLst xmlns:a="http://schemas.openxmlformats.org/drawingml/2006/main">
               <a:ext uri="{FF2B5EF4-FFF2-40B4-BE49-F238E27FC236}">
-                <a16:creationId xmlns:a16="http://schemas.microsoft.com/office/drawing/2014/main" id="{6955BB19-274F-41A7-8349-2A1AF47DDA18}"/>
+                <a16:creationId xmlns:a16="http://schemas.microsoft.com/office/drawing/2014/main" id="{9AEB7129-D5FA-4A1A-8D06-B5F160E245E3}"/>
               </a:ext>
             </a:extLst>
           </p:cNvPr>
@@ -4195,7 +4195,7 @@
     </p:spTree>
     <p:extLst>
       <p:ext uri="{BB962C8B-B14F-4D97-AF65-F5344CB8AC3E}">
-        <p14:creationId xmlns:p14="http://schemas.microsoft.com/office/powerpoint/2010/main" val="1081836074"/>
+        <p14:creationId xmlns:p14="http://schemas.microsoft.com/office/powerpoint/2010/main" val="351652434"/>
       </p:ext>
     </p:extLst>
   </p:cSld>
@@ -4350,7 +4350,7 @@
           <p:cNvPr id="23" name="">
             <a:extLst xmlns:a="http://schemas.openxmlformats.org/drawingml/2006/main">
               <a:ext uri="{FF2B5EF4-FFF2-40B4-BE49-F238E27FC236}">
-                <a16:creationId xmlns:a16="http://schemas.microsoft.com/office/drawing/2014/main" id="{E2E2B535-D08F-472F-8522-509D53E6E948}"/>
+                <a16:creationId xmlns:a16="http://schemas.microsoft.com/office/drawing/2014/main" id="{3A7D72FA-D8EC-40F5-9407-3E0BF6832234}"/>
               </a:ext>
             </a:extLst>
           </p:cNvPr>
@@ -4382,7 +4382,7 @@
           <p:cNvPr id="2" name="">
             <a:extLst xmlns:a="http://schemas.openxmlformats.org/drawingml/2006/main">
               <a:ext uri="{FF2B5EF4-FFF2-40B4-BE49-F238E27FC236}">
-                <a16:creationId xmlns:a16="http://schemas.microsoft.com/office/drawing/2014/main" id="{59685411-6794-468B-A51C-4731F2005BB3}"/>
+                <a16:creationId xmlns:a16="http://schemas.microsoft.com/office/drawing/2014/main" id="{CFF759B7-E331-4691-91C5-A70B3E8D094D}"/>
               </a:ext>
             </a:extLst>
           </p:cNvPr>
@@ -4439,7 +4439,7 @@
           <p:cNvPr id="3" name="">
             <a:extLst xmlns:a="http://schemas.openxmlformats.org/drawingml/2006/main">
               <a:ext uri="{FF2B5EF4-FFF2-40B4-BE49-F238E27FC236}">
-                <a16:creationId xmlns:a16="http://schemas.microsoft.com/office/drawing/2014/main" id="{80B7A8BD-D393-4376-BDCB-B7E1A4E20AF6}"/>
+                <a16:creationId xmlns:a16="http://schemas.microsoft.com/office/drawing/2014/main" id="{BF0C6A99-2FB5-4A98-A56B-1F7BC83CCC85}"/>
               </a:ext>
             </a:extLst>
           </p:cNvPr>
@@ -4471,7 +4471,7 @@
           <p:cNvPr id="4" name="">
             <a:extLst xmlns:a="http://schemas.openxmlformats.org/drawingml/2006/main">
               <a:ext uri="{FF2B5EF4-FFF2-40B4-BE49-F238E27FC236}">
-                <a16:creationId xmlns:a16="http://schemas.microsoft.com/office/drawing/2014/main" id="{D864E746-FBC3-4795-A4C7-1F16588637DE}"/>
+                <a16:creationId xmlns:a16="http://schemas.microsoft.com/office/drawing/2014/main" id="{DF719FAC-EB4D-4FEF-848D-5B6A95C3E49C}"/>
               </a:ext>
             </a:extLst>
           </p:cNvPr>
@@ -4528,7 +4528,7 @@
           <p:cNvPr id="5" name="">
             <a:extLst xmlns:a="http://schemas.openxmlformats.org/drawingml/2006/main">
               <a:ext uri="{FF2B5EF4-FFF2-40B4-BE49-F238E27FC236}">
-                <a16:creationId xmlns:a16="http://schemas.microsoft.com/office/drawing/2014/main" id="{A340ED8D-67A5-4E42-885E-2B37105BD7D1}"/>
+                <a16:creationId xmlns:a16="http://schemas.microsoft.com/office/drawing/2014/main" id="{448057D8-482D-488F-AA3E-E1A305E83E9F}"/>
               </a:ext>
             </a:extLst>
           </p:cNvPr>
@@ -4585,7 +4585,7 @@
           <p:cNvPr id="6" name="">
             <a:extLst xmlns:a="http://schemas.openxmlformats.org/drawingml/2006/main">
               <a:ext uri="{FF2B5EF4-FFF2-40B4-BE49-F238E27FC236}">
-                <a16:creationId xmlns:a16="http://schemas.microsoft.com/office/drawing/2014/main" id="{F362C094-E99D-48C2-A9C9-CA957B6DCBE4}"/>
+                <a16:creationId xmlns:a16="http://schemas.microsoft.com/office/drawing/2014/main" id="{8F9424C3-3D53-4D26-A457-AE37BB413F52}"/>
               </a:ext>
             </a:extLst>
           </p:cNvPr>
@@ -4642,7 +4642,7 @@
           <p:cNvPr id="7" name="">
             <a:extLst xmlns:a="http://schemas.openxmlformats.org/drawingml/2006/main">
               <a:ext uri="{FF2B5EF4-FFF2-40B4-BE49-F238E27FC236}">
-                <a16:creationId xmlns:a16="http://schemas.microsoft.com/office/drawing/2014/main" id="{D04388CB-35D3-43C4-BB45-84E5C74C5D66}"/>
+                <a16:creationId xmlns:a16="http://schemas.microsoft.com/office/drawing/2014/main" id="{B4660F74-3958-477A-A25D-363CB315837E}"/>
               </a:ext>
             </a:extLst>
           </p:cNvPr>
@@ -4674,7 +4674,7 @@
           <p:cNvPr id="8" name="">
             <a:extLst xmlns:a="http://schemas.openxmlformats.org/drawingml/2006/main">
               <a:ext uri="{FF2B5EF4-FFF2-40B4-BE49-F238E27FC236}">
-                <a16:creationId xmlns:a16="http://schemas.microsoft.com/office/drawing/2014/main" id="{3902CE19-912D-4E54-BBD6-E0F961B2B882}"/>
+                <a16:creationId xmlns:a16="http://schemas.microsoft.com/office/drawing/2014/main" id="{7F1AA0DA-6894-4522-BDF2-CED8029B2588}"/>
               </a:ext>
             </a:extLst>
           </p:cNvPr>
@@ -4731,7 +4731,7 @@
           <p:cNvPr id="9" name="">
             <a:extLst xmlns:a="http://schemas.openxmlformats.org/drawingml/2006/main">
               <a:ext uri="{FF2B5EF4-FFF2-40B4-BE49-F238E27FC236}">
-                <a16:creationId xmlns:a16="http://schemas.microsoft.com/office/drawing/2014/main" id="{04DC2B84-BC0C-4307-83F9-636BAD4BD84D}"/>
+                <a16:creationId xmlns:a16="http://schemas.microsoft.com/office/drawing/2014/main" id="{4B8EB991-AC68-4B3E-86C9-5BEFD5449D65}"/>
               </a:ext>
             </a:extLst>
           </p:cNvPr>
@@ -4788,7 +4788,7 @@
           <p:cNvPr id="10" name="">
             <a:extLst xmlns:a="http://schemas.openxmlformats.org/drawingml/2006/main">
               <a:ext uri="{FF2B5EF4-FFF2-40B4-BE49-F238E27FC236}">
-                <a16:creationId xmlns:a16="http://schemas.microsoft.com/office/drawing/2014/main" id="{5CCD63BC-B3BB-4318-9E43-AC1076F99055}"/>
+                <a16:creationId xmlns:a16="http://schemas.microsoft.com/office/drawing/2014/main" id="{5D062FC8-71C8-41EB-80B1-9F8890B96E5D}"/>
               </a:ext>
             </a:extLst>
           </p:cNvPr>
@@ -4822,7 +4822,7 @@
           <p:cNvPr id="11" name="">
             <a:extLst xmlns:a="http://schemas.openxmlformats.org/drawingml/2006/main">
               <a:ext uri="{FF2B5EF4-FFF2-40B4-BE49-F238E27FC236}">
-                <a16:creationId xmlns:a16="http://schemas.microsoft.com/office/drawing/2014/main" id="{BE5A4EB3-AFB0-44D9-BB61-AA48A49F0345}"/>
+                <a16:creationId xmlns:a16="http://schemas.microsoft.com/office/drawing/2014/main" id="{8CF2CC77-EA28-4AF1-9B52-4D9751106C5C}"/>
               </a:ext>
             </a:extLst>
           </p:cNvPr>
@@ -4854,7 +4854,7 @@
           <p:cNvPr id="12" name="">
             <a:extLst xmlns:a="http://schemas.openxmlformats.org/drawingml/2006/main">
               <a:ext uri="{FF2B5EF4-FFF2-40B4-BE49-F238E27FC236}">
-                <a16:creationId xmlns:a16="http://schemas.microsoft.com/office/drawing/2014/main" id="{FF85E028-F7E9-4470-A68B-2BB8FA1BBE01}"/>
+                <a16:creationId xmlns:a16="http://schemas.microsoft.com/office/drawing/2014/main" id="{F8187468-A614-4C13-AD6E-932808590EB7}"/>
               </a:ext>
             </a:extLst>
           </p:cNvPr>
@@ -4911,7 +4911,7 @@
           <p:cNvPr id="13" name="">
             <a:extLst xmlns:a="http://schemas.openxmlformats.org/drawingml/2006/main">
               <a:ext uri="{FF2B5EF4-FFF2-40B4-BE49-F238E27FC236}">
-                <a16:creationId xmlns:a16="http://schemas.microsoft.com/office/drawing/2014/main" id="{23A03DAD-FABF-4C7C-AE44-EC5742035998}"/>
+                <a16:creationId xmlns:a16="http://schemas.microsoft.com/office/drawing/2014/main" id="{817D77E5-FE35-40E7-B375-8303FCE3495E}"/>
               </a:ext>
             </a:extLst>
           </p:cNvPr>
@@ -4968,7 +4968,7 @@
           <p:cNvPr id="14" name="">
             <a:extLst xmlns:a="http://schemas.openxmlformats.org/drawingml/2006/main">
               <a:ext uri="{FF2B5EF4-FFF2-40B4-BE49-F238E27FC236}">
-                <a16:creationId xmlns:a16="http://schemas.microsoft.com/office/drawing/2014/main" id="{4775C455-1123-4E9B-AC66-22CE159BADBE}"/>
+                <a16:creationId xmlns:a16="http://schemas.microsoft.com/office/drawing/2014/main" id="{8AF9177F-7B72-4CB0-8ED5-BB3C6CF51153}"/>
               </a:ext>
             </a:extLst>
           </p:cNvPr>
@@ -5002,7 +5002,7 @@
           <p:cNvPr id="15" name="">
             <a:extLst xmlns:a="http://schemas.openxmlformats.org/drawingml/2006/main">
               <a:ext uri="{FF2B5EF4-FFF2-40B4-BE49-F238E27FC236}">
-                <a16:creationId xmlns:a16="http://schemas.microsoft.com/office/drawing/2014/main" id="{FD4F2B4C-2FBF-4CD4-9125-385736F6BDF3}"/>
+                <a16:creationId xmlns:a16="http://schemas.microsoft.com/office/drawing/2014/main" id="{E065A347-91EF-4B36-A24E-85502014E49B}"/>
               </a:ext>
             </a:extLst>
           </p:cNvPr>
@@ -5034,7 +5034,7 @@
           <p:cNvPr id="16" name="">
             <a:extLst xmlns:a="http://schemas.openxmlformats.org/drawingml/2006/main">
               <a:ext uri="{FF2B5EF4-FFF2-40B4-BE49-F238E27FC236}">
-                <a16:creationId xmlns:a16="http://schemas.microsoft.com/office/drawing/2014/main" id="{510132EF-B26F-4176-8B52-78DBF1DD6012}"/>
+                <a16:creationId xmlns:a16="http://schemas.microsoft.com/office/drawing/2014/main" id="{06215082-5A9B-428D-8FBD-6EDD50FD2CEF}"/>
               </a:ext>
             </a:extLst>
           </p:cNvPr>
@@ -5091,7 +5091,7 @@
           <p:cNvPr id="17" name="">
             <a:extLst xmlns:a="http://schemas.openxmlformats.org/drawingml/2006/main">
               <a:ext uri="{FF2B5EF4-FFF2-40B4-BE49-F238E27FC236}">
-                <a16:creationId xmlns:a16="http://schemas.microsoft.com/office/drawing/2014/main" id="{826F716C-8F58-45A2-86FA-472F782CD1AC}"/>
+                <a16:creationId xmlns:a16="http://schemas.microsoft.com/office/drawing/2014/main" id="{F3827541-F4F0-4B51-AD82-B28F6F7BE971}"/>
               </a:ext>
             </a:extLst>
           </p:cNvPr>
@@ -5148,7 +5148,7 @@
           <p:cNvPr id="18" name="">
             <a:extLst xmlns:a="http://schemas.openxmlformats.org/drawingml/2006/main">
               <a:ext uri="{FF2B5EF4-FFF2-40B4-BE49-F238E27FC236}">
-                <a16:creationId xmlns:a16="http://schemas.microsoft.com/office/drawing/2014/main" id="{F569DDF1-2D29-48A5-881E-D0F04707EB4B}"/>
+                <a16:creationId xmlns:a16="http://schemas.microsoft.com/office/drawing/2014/main" id="{94624A51-6AF5-430A-8D0F-938B59AEB3EE}"/>
               </a:ext>
             </a:extLst>
           </p:cNvPr>
@@ -5182,7 +5182,7 @@
           <p:cNvPr id="19" name="">
             <a:extLst xmlns:a="http://schemas.openxmlformats.org/drawingml/2006/main">
               <a:ext uri="{FF2B5EF4-FFF2-40B4-BE49-F238E27FC236}">
-                <a16:creationId xmlns:a16="http://schemas.microsoft.com/office/drawing/2014/main" id="{FD55FF95-61FD-43CF-8777-8343832DFF94}"/>
+                <a16:creationId xmlns:a16="http://schemas.microsoft.com/office/drawing/2014/main" id="{C9B49078-A13A-42DA-8AA2-A45DAB0FAD42}"/>
               </a:ext>
             </a:extLst>
           </p:cNvPr>
@@ -5214,7 +5214,7 @@
           <p:cNvPr id="20" name="">
             <a:extLst xmlns:a="http://schemas.openxmlformats.org/drawingml/2006/main">
               <a:ext uri="{FF2B5EF4-FFF2-40B4-BE49-F238E27FC236}">
-                <a16:creationId xmlns:a16="http://schemas.microsoft.com/office/drawing/2014/main" id="{F7493A14-2CE4-499A-BE00-07E1E8B7AA76}"/>
+                <a16:creationId xmlns:a16="http://schemas.microsoft.com/office/drawing/2014/main" id="{0AAEF7E4-B9D8-43D1-91F5-ED2A76E2D9F3}"/>
               </a:ext>
             </a:extLst>
           </p:cNvPr>
@@ -5271,7 +5271,7 @@
           <p:cNvPr id="21" name="">
             <a:extLst xmlns:a="http://schemas.openxmlformats.org/drawingml/2006/main">
               <a:ext uri="{FF2B5EF4-FFF2-40B4-BE49-F238E27FC236}">
-                <a16:creationId xmlns:a16="http://schemas.microsoft.com/office/drawing/2014/main" id="{8C7B3B92-2DAA-4A56-ABE7-D8F1E1BE4220}"/>
+                <a16:creationId xmlns:a16="http://schemas.microsoft.com/office/drawing/2014/main" id="{374AD442-B55C-43FE-B71F-E588C03032B5}"/>
               </a:ext>
             </a:extLst>
           </p:cNvPr>
@@ -5328,7 +5328,7 @@
           <p:cNvPr id="22" name="">
             <a:extLst xmlns:a="http://schemas.openxmlformats.org/drawingml/2006/main">
               <a:ext uri="{FF2B5EF4-FFF2-40B4-BE49-F238E27FC236}">
-                <a16:creationId xmlns:a16="http://schemas.microsoft.com/office/drawing/2014/main" id="{CBD72C49-B875-44F5-9890-3458D1761648}"/>
+                <a16:creationId xmlns:a16="http://schemas.microsoft.com/office/drawing/2014/main" id="{06C033BB-2F9D-4AEE-A84D-D4E0E9EF782C}"/>
               </a:ext>
             </a:extLst>
           </p:cNvPr>
@@ -5383,7 +5383,7 @@
     </p:spTree>
     <p:extLst>
       <p:ext uri="{BB962C8B-B14F-4D97-AF65-F5344CB8AC3E}">
-        <p14:creationId xmlns:p14="http://schemas.microsoft.com/office/powerpoint/2010/main" val="1168641165"/>
+        <p14:creationId xmlns:p14="http://schemas.microsoft.com/office/powerpoint/2010/main" val="275930606"/>
       </p:ext>
     </p:extLst>
   </p:cSld>
@@ -5584,7 +5584,7 @@
           <p:cNvPr id="23" name="">
             <a:extLst xmlns:a="http://schemas.openxmlformats.org/drawingml/2006/main">
               <a:ext uri="{FF2B5EF4-FFF2-40B4-BE49-F238E27FC236}">
-                <a16:creationId xmlns:a16="http://schemas.microsoft.com/office/drawing/2014/main" id="{69A5DBD5-753B-4F44-A0D4-76036B3799C7}"/>
+                <a16:creationId xmlns:a16="http://schemas.microsoft.com/office/drawing/2014/main" id="{2DCCF3A5-5972-4477-A82B-9CB4C1565E4B}"/>
               </a:ext>
             </a:extLst>
           </p:cNvPr>
@@ -5616,7 +5616,7 @@
           <p:cNvPr id="2" name="">
             <a:extLst xmlns:a="http://schemas.openxmlformats.org/drawingml/2006/main">
               <a:ext uri="{FF2B5EF4-FFF2-40B4-BE49-F238E27FC236}">
-                <a16:creationId xmlns:a16="http://schemas.microsoft.com/office/drawing/2014/main" id="{9F2258CB-7D52-476A-B57F-0826E1E2C8BB}"/>
+                <a16:creationId xmlns:a16="http://schemas.microsoft.com/office/drawing/2014/main" id="{EE23FC8C-7E07-43EC-AE21-6F8DB1ED9877}"/>
               </a:ext>
             </a:extLst>
           </p:cNvPr>
@@ -5673,7 +5673,7 @@
           <p:cNvPr id="3" name="">
             <a:extLst xmlns:a="http://schemas.openxmlformats.org/drawingml/2006/main">
               <a:ext uri="{FF2B5EF4-FFF2-40B4-BE49-F238E27FC236}">
-                <a16:creationId xmlns:a16="http://schemas.microsoft.com/office/drawing/2014/main" id="{AB3108E1-A8FF-490A-9F6B-FDEB06B697CE}"/>
+                <a16:creationId xmlns:a16="http://schemas.microsoft.com/office/drawing/2014/main" id="{C52EBC0F-8072-41AF-B709-279AAE968A7C}"/>
               </a:ext>
             </a:extLst>
           </p:cNvPr>
@@ -5705,7 +5705,7 @@
           <p:cNvPr id="4" name="">
             <a:extLst xmlns:a="http://schemas.openxmlformats.org/drawingml/2006/main">
               <a:ext uri="{FF2B5EF4-FFF2-40B4-BE49-F238E27FC236}">
-                <a16:creationId xmlns:a16="http://schemas.microsoft.com/office/drawing/2014/main" id="{C7539A42-B685-40F2-B2BB-F25F8BB9AA98}"/>
+                <a16:creationId xmlns:a16="http://schemas.microsoft.com/office/drawing/2014/main" id="{A8BB7CC6-B6F0-4F55-B805-2EA2CFCF9D22}"/>
               </a:ext>
             </a:extLst>
           </p:cNvPr>
@@ -5762,7 +5762,7 @@
           <p:cNvPr id="5" name="">
             <a:extLst xmlns:a="http://schemas.openxmlformats.org/drawingml/2006/main">
               <a:ext uri="{FF2B5EF4-FFF2-40B4-BE49-F238E27FC236}">
-                <a16:creationId xmlns:a16="http://schemas.microsoft.com/office/drawing/2014/main" id="{B59F81A9-867F-426E-938E-C19A39BAD5AA}"/>
+                <a16:creationId xmlns:a16="http://schemas.microsoft.com/office/drawing/2014/main" id="{B9D175A0-110B-42CF-90DD-CC305D9D762D}"/>
               </a:ext>
             </a:extLst>
           </p:cNvPr>
@@ -5819,7 +5819,7 @@
           <p:cNvPr id="6" name="">
             <a:extLst xmlns:a="http://schemas.openxmlformats.org/drawingml/2006/main">
               <a:ext uri="{FF2B5EF4-FFF2-40B4-BE49-F238E27FC236}">
-                <a16:creationId xmlns:a16="http://schemas.microsoft.com/office/drawing/2014/main" id="{B3EB571D-2C4D-4446-AD41-15A02CE4C010}"/>
+                <a16:creationId xmlns:a16="http://schemas.microsoft.com/office/drawing/2014/main" id="{D976CCBD-1E2D-47C2-8BB3-60865655F7C3}"/>
               </a:ext>
             </a:extLst>
           </p:cNvPr>
@@ -5876,7 +5876,7 @@
           <p:cNvPr id="7" name="">
             <a:extLst xmlns:a="http://schemas.openxmlformats.org/drawingml/2006/main">
               <a:ext uri="{FF2B5EF4-FFF2-40B4-BE49-F238E27FC236}">
-                <a16:creationId xmlns:a16="http://schemas.microsoft.com/office/drawing/2014/main" id="{C5DD00BC-4C6D-4BF4-B290-AA1776715B2E}"/>
+                <a16:creationId xmlns:a16="http://schemas.microsoft.com/office/drawing/2014/main" id="{F8129795-F017-4870-B6E5-5B6A1129036F}"/>
               </a:ext>
             </a:extLst>
           </p:cNvPr>
@@ -5908,7 +5908,7 @@
           <p:cNvPr id="8" name="">
             <a:extLst xmlns:a="http://schemas.openxmlformats.org/drawingml/2006/main">
               <a:ext uri="{FF2B5EF4-FFF2-40B4-BE49-F238E27FC236}">
-                <a16:creationId xmlns:a16="http://schemas.microsoft.com/office/drawing/2014/main" id="{FEEE885D-0FCF-4450-98DA-F83810A0BD6A}"/>
+                <a16:creationId xmlns:a16="http://schemas.microsoft.com/office/drawing/2014/main" id="{353F92CD-F3EE-40C9-B2DF-38040C277E7E}"/>
               </a:ext>
             </a:extLst>
           </p:cNvPr>
@@ -5965,7 +5965,7 @@
           <p:cNvPr id="9" name="">
             <a:extLst xmlns:a="http://schemas.openxmlformats.org/drawingml/2006/main">
               <a:ext uri="{FF2B5EF4-FFF2-40B4-BE49-F238E27FC236}">
-                <a16:creationId xmlns:a16="http://schemas.microsoft.com/office/drawing/2014/main" id="{5018128A-9984-4EFE-ABC1-C5D826DD53A9}"/>
+                <a16:creationId xmlns:a16="http://schemas.microsoft.com/office/drawing/2014/main" id="{BC11B2D7-4A3E-41DC-9171-911A9201F3EC}"/>
               </a:ext>
             </a:extLst>
           </p:cNvPr>
@@ -6022,7 +6022,7 @@
           <p:cNvPr id="10" name="">
             <a:extLst xmlns:a="http://schemas.openxmlformats.org/drawingml/2006/main">
               <a:ext uri="{FF2B5EF4-FFF2-40B4-BE49-F238E27FC236}">
-                <a16:creationId xmlns:a16="http://schemas.microsoft.com/office/drawing/2014/main" id="{960C5D52-4CED-4AC6-A7F9-5E64400A0E69}"/>
+                <a16:creationId xmlns:a16="http://schemas.microsoft.com/office/drawing/2014/main" id="{FDFBCB32-D257-4177-ACBD-1809C2806BDF}"/>
               </a:ext>
             </a:extLst>
           </p:cNvPr>
@@ -6056,7 +6056,7 @@
           <p:cNvPr id="11" name="">
             <a:extLst xmlns:a="http://schemas.openxmlformats.org/drawingml/2006/main">
               <a:ext uri="{FF2B5EF4-FFF2-40B4-BE49-F238E27FC236}">
-                <a16:creationId xmlns:a16="http://schemas.microsoft.com/office/drawing/2014/main" id="{4E6813F6-A235-42CF-A95F-74FE6AAA3EE1}"/>
+                <a16:creationId xmlns:a16="http://schemas.microsoft.com/office/drawing/2014/main" id="{A4819B6F-EA06-4E86-9AE5-91139FEF1672}"/>
               </a:ext>
             </a:extLst>
           </p:cNvPr>
@@ -6088,7 +6088,7 @@
           <p:cNvPr id="12" name="">
             <a:extLst xmlns:a="http://schemas.openxmlformats.org/drawingml/2006/main">
               <a:ext uri="{FF2B5EF4-FFF2-40B4-BE49-F238E27FC236}">
-                <a16:creationId xmlns:a16="http://schemas.microsoft.com/office/drawing/2014/main" id="{01236554-FFF6-4861-AE5D-31C37ABB02D6}"/>
+                <a16:creationId xmlns:a16="http://schemas.microsoft.com/office/drawing/2014/main" id="{3C7EE73B-003F-402F-8EBA-07F0D301203F}"/>
               </a:ext>
             </a:extLst>
           </p:cNvPr>
@@ -6145,7 +6145,7 @@
           <p:cNvPr id="13" name="">
             <a:extLst xmlns:a="http://schemas.openxmlformats.org/drawingml/2006/main">
               <a:ext uri="{FF2B5EF4-FFF2-40B4-BE49-F238E27FC236}">
-                <a16:creationId xmlns:a16="http://schemas.microsoft.com/office/drawing/2014/main" id="{AC5F56AB-BFD9-417F-98C1-2A98F438AE16}"/>
+                <a16:creationId xmlns:a16="http://schemas.microsoft.com/office/drawing/2014/main" id="{C50F4145-3AB1-4D63-B68D-5C3AB34201CB}"/>
               </a:ext>
             </a:extLst>
           </p:cNvPr>
@@ -6202,7 +6202,7 @@
           <p:cNvPr id="14" name="">
             <a:extLst xmlns:a="http://schemas.openxmlformats.org/drawingml/2006/main">
               <a:ext uri="{FF2B5EF4-FFF2-40B4-BE49-F238E27FC236}">
-                <a16:creationId xmlns:a16="http://schemas.microsoft.com/office/drawing/2014/main" id="{FDAAE400-5BAD-4EE2-8868-9CF52C88106E}"/>
+                <a16:creationId xmlns:a16="http://schemas.microsoft.com/office/drawing/2014/main" id="{2EAE9CFF-A900-4108-99BC-C1D26550993F}"/>
               </a:ext>
             </a:extLst>
           </p:cNvPr>
@@ -6236,7 +6236,7 @@
           <p:cNvPr id="15" name="">
             <a:extLst xmlns:a="http://schemas.openxmlformats.org/drawingml/2006/main">
               <a:ext uri="{FF2B5EF4-FFF2-40B4-BE49-F238E27FC236}">
-                <a16:creationId xmlns:a16="http://schemas.microsoft.com/office/drawing/2014/main" id="{A1F95635-FB07-4BC8-930E-288181D84E68}"/>
+                <a16:creationId xmlns:a16="http://schemas.microsoft.com/office/drawing/2014/main" id="{D6F2AD4E-2FB9-441B-8AD3-6FE11C0FBDFF}"/>
               </a:ext>
             </a:extLst>
           </p:cNvPr>
@@ -6268,7 +6268,7 @@
           <p:cNvPr id="16" name="">
             <a:extLst xmlns:a="http://schemas.openxmlformats.org/drawingml/2006/main">
               <a:ext uri="{FF2B5EF4-FFF2-40B4-BE49-F238E27FC236}">
-                <a16:creationId xmlns:a16="http://schemas.microsoft.com/office/drawing/2014/main" id="{D2EA3940-BEB9-4128-946F-E81E624CEF76}"/>
+                <a16:creationId xmlns:a16="http://schemas.microsoft.com/office/drawing/2014/main" id="{9DB3AC0A-1129-4BF8-A016-EFFCA611E494}"/>
               </a:ext>
             </a:extLst>
           </p:cNvPr>
@@ -6325,7 +6325,7 @@
           <p:cNvPr id="17" name="">
             <a:extLst xmlns:a="http://schemas.openxmlformats.org/drawingml/2006/main">
               <a:ext uri="{FF2B5EF4-FFF2-40B4-BE49-F238E27FC236}">
-                <a16:creationId xmlns:a16="http://schemas.microsoft.com/office/drawing/2014/main" id="{A4C50F6E-3874-4A51-9D53-D7AC0D860B4A}"/>
+                <a16:creationId xmlns:a16="http://schemas.microsoft.com/office/drawing/2014/main" id="{E41F17CD-C999-4327-852C-E4F7672DAFDA}"/>
               </a:ext>
             </a:extLst>
           </p:cNvPr>
@@ -6382,7 +6382,7 @@
           <p:cNvPr id="18" name="">
             <a:extLst xmlns:a="http://schemas.openxmlformats.org/drawingml/2006/main">
               <a:ext uri="{FF2B5EF4-FFF2-40B4-BE49-F238E27FC236}">
-                <a16:creationId xmlns:a16="http://schemas.microsoft.com/office/drawing/2014/main" id="{5783C98A-A3E1-4E26-B4B8-3EDB1EA912F4}"/>
+                <a16:creationId xmlns:a16="http://schemas.microsoft.com/office/drawing/2014/main" id="{5BB42EFC-2C72-4BED-96A3-264962919788}"/>
               </a:ext>
             </a:extLst>
           </p:cNvPr>
@@ -6416,7 +6416,7 @@
           <p:cNvPr id="19" name="">
             <a:extLst xmlns:a="http://schemas.openxmlformats.org/drawingml/2006/main">
               <a:ext uri="{FF2B5EF4-FFF2-40B4-BE49-F238E27FC236}">
-                <a16:creationId xmlns:a16="http://schemas.microsoft.com/office/drawing/2014/main" id="{F6F35803-18C7-4249-9B05-CD3AA265F925}"/>
+                <a16:creationId xmlns:a16="http://schemas.microsoft.com/office/drawing/2014/main" id="{3F44CAEA-DFD7-465A-A0A3-72773091513B}"/>
               </a:ext>
             </a:extLst>
           </p:cNvPr>
@@ -6448,7 +6448,7 @@
           <p:cNvPr id="20" name="">
             <a:extLst xmlns:a="http://schemas.openxmlformats.org/drawingml/2006/main">
               <a:ext uri="{FF2B5EF4-FFF2-40B4-BE49-F238E27FC236}">
-                <a16:creationId xmlns:a16="http://schemas.microsoft.com/office/drawing/2014/main" id="{F7535AEF-2412-4786-8787-C5B040ECDF43}"/>
+                <a16:creationId xmlns:a16="http://schemas.microsoft.com/office/drawing/2014/main" id="{80EEBD4A-8D3C-4A92-B9DF-6B182FB22E77}"/>
               </a:ext>
             </a:extLst>
           </p:cNvPr>
@@ -6505,7 +6505,7 @@
           <p:cNvPr id="21" name="">
             <a:extLst xmlns:a="http://schemas.openxmlformats.org/drawingml/2006/main">
               <a:ext uri="{FF2B5EF4-FFF2-40B4-BE49-F238E27FC236}">
-                <a16:creationId xmlns:a16="http://schemas.microsoft.com/office/drawing/2014/main" id="{D57F86E2-B5F7-4149-9805-F316AB174165}"/>
+                <a16:creationId xmlns:a16="http://schemas.microsoft.com/office/drawing/2014/main" id="{984485B0-477A-4C8A-8131-58FC38163EF8}"/>
               </a:ext>
             </a:extLst>
           </p:cNvPr>
@@ -6562,7 +6562,7 @@
           <p:cNvPr id="22" name="">
             <a:extLst xmlns:a="http://schemas.openxmlformats.org/drawingml/2006/main">
               <a:ext uri="{FF2B5EF4-FFF2-40B4-BE49-F238E27FC236}">
-                <a16:creationId xmlns:a16="http://schemas.microsoft.com/office/drawing/2014/main" id="{B04CD169-820F-4A95-88E1-F5203798E57B}"/>
+                <a16:creationId xmlns:a16="http://schemas.microsoft.com/office/drawing/2014/main" id="{2D85655E-6EB0-45BA-8B68-1A29ABC495CB}"/>
               </a:ext>
             </a:extLst>
           </p:cNvPr>
@@ -6617,7 +6617,7 @@
     </p:spTree>
     <p:extLst>
       <p:ext uri="{BB962C8B-B14F-4D97-AF65-F5344CB8AC3E}">
-        <p14:creationId xmlns:p14="http://schemas.microsoft.com/office/powerpoint/2010/main" val="1108108404"/>
+        <p14:creationId xmlns:p14="http://schemas.microsoft.com/office/powerpoint/2010/main" val="1232793418"/>
       </p:ext>
     </p:extLst>
   </p:cSld>
@@ -6818,7 +6818,7 @@
           <p:cNvPr id="16" name="">
             <a:extLst xmlns:a="http://schemas.openxmlformats.org/drawingml/2006/main">
               <a:ext uri="{FF2B5EF4-FFF2-40B4-BE49-F238E27FC236}">
-                <a16:creationId xmlns:a16="http://schemas.microsoft.com/office/drawing/2014/main" id="{B559795C-7F43-4658-B5E5-887E7E2CF413}"/>
+                <a16:creationId xmlns:a16="http://schemas.microsoft.com/office/drawing/2014/main" id="{7EBFAE40-5ED6-4172-8012-0495676E38EB}"/>
               </a:ext>
             </a:extLst>
           </p:cNvPr>
@@ -6850,7 +6850,7 @@
           <p:cNvPr id="2" name="">
             <a:extLst xmlns:a="http://schemas.openxmlformats.org/drawingml/2006/main">
               <a:ext uri="{FF2B5EF4-FFF2-40B4-BE49-F238E27FC236}">
-                <a16:creationId xmlns:a16="http://schemas.microsoft.com/office/drawing/2014/main" id="{9DA3AE56-DBCB-4A4C-97B0-3CAC426F840F}"/>
+                <a16:creationId xmlns:a16="http://schemas.microsoft.com/office/drawing/2014/main" id="{14A50D70-450F-475E-9A06-A06B0668B836}"/>
               </a:ext>
             </a:extLst>
           </p:cNvPr>
@@ -6907,7 +6907,7 @@
           <p:cNvPr id="3" name="">
             <a:extLst xmlns:a="http://schemas.openxmlformats.org/drawingml/2006/main">
               <a:ext uri="{FF2B5EF4-FFF2-40B4-BE49-F238E27FC236}">
-                <a16:creationId xmlns:a16="http://schemas.microsoft.com/office/drawing/2014/main" id="{C015E608-AE52-47E1-8FFB-744582B6C9B3}"/>
+                <a16:creationId xmlns:a16="http://schemas.microsoft.com/office/drawing/2014/main" id="{558410C8-13E5-4D95-A4BE-EC10EC766182}"/>
               </a:ext>
             </a:extLst>
           </p:cNvPr>
@@ -6939,7 +6939,7 @@
           <p:cNvPr id="4" name="">
             <a:extLst xmlns:a="http://schemas.openxmlformats.org/drawingml/2006/main">
               <a:ext uri="{FF2B5EF4-FFF2-40B4-BE49-F238E27FC236}">
-                <a16:creationId xmlns:a16="http://schemas.microsoft.com/office/drawing/2014/main" id="{3F2750A0-32AC-44F0-B067-59E08C9B98FE}"/>
+                <a16:creationId xmlns:a16="http://schemas.microsoft.com/office/drawing/2014/main" id="{2DD04E4A-C61B-4359-A7F9-4A576794EC6A}"/>
               </a:ext>
             </a:extLst>
           </p:cNvPr>
@@ -6996,7 +6996,7 @@
           <p:cNvPr id="5" name="">
             <a:extLst xmlns:a="http://schemas.openxmlformats.org/drawingml/2006/main">
               <a:ext uri="{FF2B5EF4-FFF2-40B4-BE49-F238E27FC236}">
-                <a16:creationId xmlns:a16="http://schemas.microsoft.com/office/drawing/2014/main" id="{99536C43-BC5B-4DE3-BF0B-6ABD1AAD3692}"/>
+                <a16:creationId xmlns:a16="http://schemas.microsoft.com/office/drawing/2014/main" id="{6A0A88CF-61B5-4F0E-A30A-7915E95F5217}"/>
               </a:ext>
             </a:extLst>
           </p:cNvPr>
@@ -7053,7 +7053,7 @@
           <p:cNvPr id="6" name="">
             <a:extLst xmlns:a="http://schemas.openxmlformats.org/drawingml/2006/main">
               <a:ext uri="{FF2B5EF4-FFF2-40B4-BE49-F238E27FC236}">
-                <a16:creationId xmlns:a16="http://schemas.microsoft.com/office/drawing/2014/main" id="{1011BA58-4F3C-4C99-802D-CF4BACF6E231}"/>
+                <a16:creationId xmlns:a16="http://schemas.microsoft.com/office/drawing/2014/main" id="{DDCF0BA1-D23F-40E3-8845-4298EE4D23A7}"/>
               </a:ext>
             </a:extLst>
           </p:cNvPr>
@@ -7110,7 +7110,7 @@
           <p:cNvPr id="7" name="">
             <a:extLst xmlns:a="http://schemas.openxmlformats.org/drawingml/2006/main">
               <a:ext uri="{FF2B5EF4-FFF2-40B4-BE49-F238E27FC236}">
-                <a16:creationId xmlns:a16="http://schemas.microsoft.com/office/drawing/2014/main" id="{051879E0-002D-480C-AFC1-8E454E87C000}"/>
+                <a16:creationId xmlns:a16="http://schemas.microsoft.com/office/drawing/2014/main" id="{5EFC8937-FA41-4CDC-BAE9-03921CA3B18E}"/>
               </a:ext>
             </a:extLst>
           </p:cNvPr>
@@ -7142,7 +7142,7 @@
           <p:cNvPr id="8" name="">
             <a:extLst xmlns:a="http://schemas.openxmlformats.org/drawingml/2006/main">
               <a:ext uri="{FF2B5EF4-FFF2-40B4-BE49-F238E27FC236}">
-                <a16:creationId xmlns:a16="http://schemas.microsoft.com/office/drawing/2014/main" id="{4827E944-CE4A-46F7-A0E9-C592340D9B3E}"/>
+                <a16:creationId xmlns:a16="http://schemas.microsoft.com/office/drawing/2014/main" id="{3E432E7E-00E4-4EF2-99E0-790D221F830F}"/>
               </a:ext>
             </a:extLst>
           </p:cNvPr>
@@ -7199,7 +7199,7 @@
           <p:cNvPr id="9" name="">
             <a:extLst xmlns:a="http://schemas.openxmlformats.org/drawingml/2006/main">
               <a:ext uri="{FF2B5EF4-FFF2-40B4-BE49-F238E27FC236}">
-                <a16:creationId xmlns:a16="http://schemas.microsoft.com/office/drawing/2014/main" id="{A1D86EDD-F119-441B-A40F-3AE1D53E8250}"/>
+                <a16:creationId xmlns:a16="http://schemas.microsoft.com/office/drawing/2014/main" id="{23659518-D49C-426D-81E2-B4F6B7CE62EF}"/>
               </a:ext>
             </a:extLst>
           </p:cNvPr>
@@ -7256,7 +7256,7 @@
           <p:cNvPr id="10" name="">
             <a:extLst xmlns:a="http://schemas.openxmlformats.org/drawingml/2006/main">
               <a:ext uri="{FF2B5EF4-FFF2-40B4-BE49-F238E27FC236}">
-                <a16:creationId xmlns:a16="http://schemas.microsoft.com/office/drawing/2014/main" id="{37DF71D1-CB7D-4E82-8C8A-3028D09413F5}"/>
+                <a16:creationId xmlns:a16="http://schemas.microsoft.com/office/drawing/2014/main" id="{AEEA23B0-6500-482C-A39F-13F8D651700A}"/>
               </a:ext>
             </a:extLst>
           </p:cNvPr>
@@ -7313,7 +7313,7 @@
           <p:cNvPr id="11" name="">
             <a:extLst xmlns:a="http://schemas.openxmlformats.org/drawingml/2006/main">
               <a:ext uri="{FF2B5EF4-FFF2-40B4-BE49-F238E27FC236}">
-                <a16:creationId xmlns:a16="http://schemas.microsoft.com/office/drawing/2014/main" id="{86596E25-5DFE-4C6D-9701-4F240F0E357B}"/>
+                <a16:creationId xmlns:a16="http://schemas.microsoft.com/office/drawing/2014/main" id="{5DDCD90A-8EB2-4C4A-AE4B-D232F9964C93}"/>
               </a:ext>
             </a:extLst>
           </p:cNvPr>
@@ -7345,7 +7345,7 @@
           <p:cNvPr id="12" name="">
             <a:extLst xmlns:a="http://schemas.openxmlformats.org/drawingml/2006/main">
               <a:ext uri="{FF2B5EF4-FFF2-40B4-BE49-F238E27FC236}">
-                <a16:creationId xmlns:a16="http://schemas.microsoft.com/office/drawing/2014/main" id="{ADBC12AE-888B-471A-8BFE-8C9FAFA461EB}"/>
+                <a16:creationId xmlns:a16="http://schemas.microsoft.com/office/drawing/2014/main" id="{86D437B7-E627-4A64-A33B-0485B377EB53}"/>
               </a:ext>
             </a:extLst>
           </p:cNvPr>
@@ -7402,7 +7402,7 @@
           <p:cNvPr id="13" name="">
             <a:extLst xmlns:a="http://schemas.openxmlformats.org/drawingml/2006/main">
               <a:ext uri="{FF2B5EF4-FFF2-40B4-BE49-F238E27FC236}">
-                <a16:creationId xmlns:a16="http://schemas.microsoft.com/office/drawing/2014/main" id="{D14D3023-88B2-4B45-80E9-2435575006F1}"/>
+                <a16:creationId xmlns:a16="http://schemas.microsoft.com/office/drawing/2014/main" id="{E3290B76-7D01-4454-A35D-291FFDD8EBE2}"/>
               </a:ext>
             </a:extLst>
           </p:cNvPr>
@@ -7459,7 +7459,7 @@
           <p:cNvPr id="14" name="">
             <a:extLst xmlns:a="http://schemas.openxmlformats.org/drawingml/2006/main">
               <a:ext uri="{FF2B5EF4-FFF2-40B4-BE49-F238E27FC236}">
-                <a16:creationId xmlns:a16="http://schemas.microsoft.com/office/drawing/2014/main" id="{2C4A9A91-71D2-4F94-92D3-F21689D3B6B0}"/>
+                <a16:creationId xmlns:a16="http://schemas.microsoft.com/office/drawing/2014/main" id="{CD1C7BCA-86CE-4954-B1A3-B3B5C573E588}"/>
               </a:ext>
             </a:extLst>
           </p:cNvPr>
@@ -7516,7 +7516,7 @@
           <p:cNvPr id="15" name="">
             <a:extLst xmlns:a="http://schemas.openxmlformats.org/drawingml/2006/main">
               <a:ext uri="{FF2B5EF4-FFF2-40B4-BE49-F238E27FC236}">
-                <a16:creationId xmlns:a16="http://schemas.microsoft.com/office/drawing/2014/main" id="{9B736405-097F-47E0-8FB6-3DC226311BFF}"/>
+                <a16:creationId xmlns:a16="http://schemas.microsoft.com/office/drawing/2014/main" id="{DDBBD140-FF77-4319-8844-99087EC144B9}"/>
               </a:ext>
             </a:extLst>
           </p:cNvPr>
@@ -7571,7 +7571,7 @@
     </p:spTree>
     <p:extLst>
       <p:ext uri="{BB962C8B-B14F-4D97-AF65-F5344CB8AC3E}">
-        <p14:creationId xmlns:p14="http://schemas.microsoft.com/office/powerpoint/2010/main" val="1445383778"/>
+        <p14:creationId xmlns:p14="http://schemas.microsoft.com/office/powerpoint/2010/main" val="464870580"/>
       </p:ext>
     </p:extLst>
   </p:cSld>
@@ -7772,7 +7772,7 @@
           <p:cNvPr id="23" name="">
             <a:extLst xmlns:a="http://schemas.openxmlformats.org/drawingml/2006/main">
               <a:ext uri="{FF2B5EF4-FFF2-40B4-BE49-F238E27FC236}">
-                <a16:creationId xmlns:a16="http://schemas.microsoft.com/office/drawing/2014/main" id="{81215E70-4494-4202-A5DF-962BFE302DF9}"/>
+                <a16:creationId xmlns:a16="http://schemas.microsoft.com/office/drawing/2014/main" id="{646D0D14-67AB-465F-8AAB-48017BA137B2}"/>
               </a:ext>
             </a:extLst>
           </p:cNvPr>
@@ -7804,7 +7804,7 @@
           <p:cNvPr id="2" name="">
             <a:extLst xmlns:a="http://schemas.openxmlformats.org/drawingml/2006/main">
               <a:ext uri="{FF2B5EF4-FFF2-40B4-BE49-F238E27FC236}">
-                <a16:creationId xmlns:a16="http://schemas.microsoft.com/office/drawing/2014/main" id="{EDFDF642-13E5-4CB9-BF0F-5A837A459992}"/>
+                <a16:creationId xmlns:a16="http://schemas.microsoft.com/office/drawing/2014/main" id="{D2A5CD81-50E1-493A-B848-E8A0BA3BEAD5}"/>
               </a:ext>
             </a:extLst>
           </p:cNvPr>
@@ -7861,7 +7861,7 @@
           <p:cNvPr id="3" name="">
             <a:extLst xmlns:a="http://schemas.openxmlformats.org/drawingml/2006/main">
               <a:ext uri="{FF2B5EF4-FFF2-40B4-BE49-F238E27FC236}">
-                <a16:creationId xmlns:a16="http://schemas.microsoft.com/office/drawing/2014/main" id="{DB8E63D6-E52C-4332-A44D-1CCBF804D73F}"/>
+                <a16:creationId xmlns:a16="http://schemas.microsoft.com/office/drawing/2014/main" id="{D688434D-7DE5-42C7-B1A8-35A16652CDF0}"/>
               </a:ext>
             </a:extLst>
           </p:cNvPr>
@@ -7893,7 +7893,7 @@
           <p:cNvPr id="4" name="">
             <a:extLst xmlns:a="http://schemas.openxmlformats.org/drawingml/2006/main">
               <a:ext uri="{FF2B5EF4-FFF2-40B4-BE49-F238E27FC236}">
-                <a16:creationId xmlns:a16="http://schemas.microsoft.com/office/drawing/2014/main" id="{FADA5BD5-A9D7-4895-9B53-C37B3FEA9118}"/>
+                <a16:creationId xmlns:a16="http://schemas.microsoft.com/office/drawing/2014/main" id="{1B29915A-9501-4F8A-A5F3-91EAB63479A9}"/>
               </a:ext>
             </a:extLst>
           </p:cNvPr>
@@ -7950,7 +7950,7 @@
           <p:cNvPr id="5" name="">
             <a:extLst xmlns:a="http://schemas.openxmlformats.org/drawingml/2006/main">
               <a:ext uri="{FF2B5EF4-FFF2-40B4-BE49-F238E27FC236}">
-                <a16:creationId xmlns:a16="http://schemas.microsoft.com/office/drawing/2014/main" id="{A0C7E171-DEA0-49E1-A4D4-EE901D55447F}"/>
+                <a16:creationId xmlns:a16="http://schemas.microsoft.com/office/drawing/2014/main" id="{B11DA65E-9CFF-4F72-8604-DC0E7238C886}"/>
               </a:ext>
             </a:extLst>
           </p:cNvPr>
@@ -8007,7 +8007,7 @@
           <p:cNvPr id="6" name="">
             <a:extLst xmlns:a="http://schemas.openxmlformats.org/drawingml/2006/main">
               <a:ext uri="{FF2B5EF4-FFF2-40B4-BE49-F238E27FC236}">
-                <a16:creationId xmlns:a16="http://schemas.microsoft.com/office/drawing/2014/main" id="{E4897F7A-C7C3-4E37-81F1-603EA37A5F41}"/>
+                <a16:creationId xmlns:a16="http://schemas.microsoft.com/office/drawing/2014/main" id="{9EE0CCD9-07D7-4D87-A192-E15D145888A0}"/>
               </a:ext>
             </a:extLst>
           </p:cNvPr>
@@ -8064,7 +8064,7 @@
           <p:cNvPr id="7" name="">
             <a:extLst xmlns:a="http://schemas.openxmlformats.org/drawingml/2006/main">
               <a:ext uri="{FF2B5EF4-FFF2-40B4-BE49-F238E27FC236}">
-                <a16:creationId xmlns:a16="http://schemas.microsoft.com/office/drawing/2014/main" id="{27DBF91E-8E21-4CBA-BAE3-604DE3F6C3A7}"/>
+                <a16:creationId xmlns:a16="http://schemas.microsoft.com/office/drawing/2014/main" id="{217087A6-551D-4626-8D63-DCCB23A2D835}"/>
               </a:ext>
             </a:extLst>
           </p:cNvPr>
@@ -8096,7 +8096,7 @@
           <p:cNvPr id="8" name="">
             <a:extLst xmlns:a="http://schemas.openxmlformats.org/drawingml/2006/main">
               <a:ext uri="{FF2B5EF4-FFF2-40B4-BE49-F238E27FC236}">
-                <a16:creationId xmlns:a16="http://schemas.microsoft.com/office/drawing/2014/main" id="{32AD9A27-CC9F-4E9F-9E33-D3B05C3CEE80}"/>
+                <a16:creationId xmlns:a16="http://schemas.microsoft.com/office/drawing/2014/main" id="{744D1006-19FD-464B-9149-7E545543866E}"/>
               </a:ext>
             </a:extLst>
           </p:cNvPr>
@@ -8153,7 +8153,7 @@
           <p:cNvPr id="9" name="">
             <a:extLst xmlns:a="http://schemas.openxmlformats.org/drawingml/2006/main">
               <a:ext uri="{FF2B5EF4-FFF2-40B4-BE49-F238E27FC236}">
-                <a16:creationId xmlns:a16="http://schemas.microsoft.com/office/drawing/2014/main" id="{D26E1EDA-A01A-44B7-B8E1-EB6B0838E445}"/>
+                <a16:creationId xmlns:a16="http://schemas.microsoft.com/office/drawing/2014/main" id="{39C682B3-09CC-411F-95B3-DFE31279D5EB}"/>
               </a:ext>
             </a:extLst>
           </p:cNvPr>
@@ -8210,19 +8210,19 @@
           <p:cNvPr id="10" name="">
             <a:extLst xmlns:a="http://schemas.openxmlformats.org/drawingml/2006/main">
               <a:ext uri="{FF2B5EF4-FFF2-40B4-BE49-F238E27FC236}">
-                <a16:creationId xmlns:a16="http://schemas.microsoft.com/office/drawing/2014/main" id="{2C58535A-09B1-4913-BF28-BAEE0A2F570D}"/>
-              </a:ext>
-            </a:extLst>
-          </p:cNvPr>
-          <p:cNvSpPr>
-            <a:spLocks xmlns:a="http://schemas.openxmlformats.org/drawingml/2006/main" noGrp="1"/>
-          </p:cNvSpPr>
-          <p:nvPr/>
-        </p:nvSpPr>
-        <p:spPr>
-          <a:xfrm xmlns:a="http://schemas.openxmlformats.org/drawingml/2006/main">
-            <a:off x="914400" y="1257300"/>
-            <a:ext cx="10363200" cy="781050"/>
+                <a16:creationId xmlns:a16="http://schemas.microsoft.com/office/drawing/2014/main" id="{5B3FCA74-F109-46C1-A3D8-A7EFA47B4DD8}"/>
+              </a:ext>
+            </a:extLst>
+          </p:cNvPr>
+          <p:cNvSpPr>
+            <a:spLocks xmlns:a="http://schemas.openxmlformats.org/drawingml/2006/main" noGrp="1"/>
+          </p:cNvSpPr>
+          <p:nvPr/>
+        </p:nvSpPr>
+        <p:spPr>
+          <a:xfrm xmlns:a="http://schemas.openxmlformats.org/drawingml/2006/main">
+            <a:off x="857250" y="1219200"/>
+            <a:ext cx="10477500" cy="742950"/>
           </a:xfrm>
           <a:prstGeom xmlns:a="http://schemas.openxmlformats.org/drawingml/2006/main" prst="rect">
             <a:avLst/>
@@ -8239,7 +8239,7 @@
           <a:lstStyle xmlns:a="http://schemas.openxmlformats.org/drawingml/2006/main"/>
           <a:p xmlns:a="http://schemas.openxmlformats.org/drawingml/2006/main">
             <a:pPr algn="ctr">
-              <a:defRPr sz="2175" b="1">
+              <a:defRPr sz="2100" b="1">
                 <a:solidFill>
                   <a:srgbClr val="17253A"/>
                 </a:solidFill>
@@ -8249,7 +8249,7 @@
               </a:defRPr>
             </a:pPr>
             <a:r>
-              <a:rPr sz="2175" b="1">
+              <a:rPr sz="2100" b="1">
                 <a:solidFill>
                   <a:srgbClr val="17253A"/>
                 </a:solidFill>
@@ -8267,28 +8267,30 @@
           <p:cNvPr id="11" name="">
             <a:extLst xmlns:a="http://schemas.openxmlformats.org/drawingml/2006/main">
               <a:ext uri="{FF2B5EF4-FFF2-40B4-BE49-F238E27FC236}">
-                <a16:creationId xmlns:a16="http://schemas.microsoft.com/office/drawing/2014/main" id="{344529B7-35ED-4854-BFBA-7514F9DE455E}"/>
-              </a:ext>
-            </a:extLst>
-          </p:cNvPr>
-          <p:cNvSpPr>
-            <a:spLocks xmlns:a="http://schemas.openxmlformats.org/drawingml/2006/main" noGrp="1"/>
-          </p:cNvSpPr>
-          <p:nvPr/>
-        </p:nvSpPr>
-        <p:spPr>
-          <a:xfrm xmlns:a="http://schemas.openxmlformats.org/drawingml/2006/main">
-            <a:off x="1000125" y="2247900"/>
-            <a:ext cx="476250" cy="476250"/>
-          </a:xfrm>
-          <a:prstGeom xmlns:a="http://schemas.openxmlformats.org/drawingml/2006/main" prst="ellipse">
+                <a16:creationId xmlns:a16="http://schemas.microsoft.com/office/drawing/2014/main" id="{6E99BF38-F9CC-4C94-B3C0-CE992147709D}"/>
+              </a:ext>
+            </a:extLst>
+          </p:cNvPr>
+          <p:cNvSpPr>
+            <a:spLocks xmlns:a="http://schemas.openxmlformats.org/drawingml/2006/main" noGrp="1"/>
+          </p:cNvSpPr>
+          <p:nvPr/>
+        </p:nvSpPr>
+        <p:spPr>
+          <a:xfrm xmlns:a="http://schemas.openxmlformats.org/drawingml/2006/main">
+            <a:off x="971550" y="2124075"/>
+            <a:ext cx="38100" cy="3524250"/>
+          </a:xfrm>
+          <a:prstGeom xmlns:a="http://schemas.openxmlformats.org/drawingml/2006/main" prst="rect">
             <a:avLst/>
           </a:prstGeom>
           <a:solidFill xmlns:a="http://schemas.openxmlformats.org/drawingml/2006/main">
-            <a:srgbClr val="18324A"/>
+            <a:srgbClr val="2C6E73"/>
           </a:solidFill>
           <a:ln xmlns:a="http://schemas.openxmlformats.org/drawingml/2006/main" w="0">
-            <a:noFill/>
+            <a:solidFill>
+              <a:srgbClr val="2C6E73"/>
+            </a:solidFill>
           </a:ln>
         </p:spPr>
       </p:sp>
@@ -8297,19 +8299,19 @@
           <p:cNvPr id="12" name="">
             <a:extLst xmlns:a="http://schemas.openxmlformats.org/drawingml/2006/main">
               <a:ext uri="{FF2B5EF4-FFF2-40B4-BE49-F238E27FC236}">
-                <a16:creationId xmlns:a16="http://schemas.microsoft.com/office/drawing/2014/main" id="{28F70743-4778-4CE1-B82F-491C6472438A}"/>
-              </a:ext>
-            </a:extLst>
-          </p:cNvPr>
-          <p:cNvSpPr>
-            <a:spLocks xmlns:a="http://schemas.openxmlformats.org/drawingml/2006/main" noGrp="1"/>
-          </p:cNvSpPr>
-          <p:nvPr/>
-        </p:nvSpPr>
-        <p:spPr>
-          <a:xfrm xmlns:a="http://schemas.openxmlformats.org/drawingml/2006/main">
-            <a:off x="1000125" y="2276475"/>
-            <a:ext cx="476250" cy="419100"/>
+                <a16:creationId xmlns:a16="http://schemas.microsoft.com/office/drawing/2014/main" id="{03AF5B56-C5FA-4926-AF3E-DF2FC759C0FE}"/>
+              </a:ext>
+            </a:extLst>
+          </p:cNvPr>
+          <p:cNvSpPr>
+            <a:spLocks xmlns:a="http://schemas.openxmlformats.org/drawingml/2006/main" noGrp="1"/>
+          </p:cNvSpPr>
+          <p:nvPr/>
+        </p:nvSpPr>
+        <p:spPr>
+          <a:xfrm xmlns:a="http://schemas.openxmlformats.org/drawingml/2006/main">
+            <a:off x="1162050" y="2200275"/>
+            <a:ext cx="400050" cy="400050"/>
           </a:xfrm>
           <a:prstGeom xmlns:a="http://schemas.openxmlformats.org/drawingml/2006/main" prst="rect">
             <a:avLst/>
@@ -8326,9 +8328,9 @@
           <a:lstStyle xmlns:a="http://schemas.openxmlformats.org/drawingml/2006/main"/>
           <a:p xmlns:a="http://schemas.openxmlformats.org/drawingml/2006/main">
             <a:pPr algn="ctr">
-              <a:defRPr sz="1350" b="1">
-                <a:solidFill>
-                  <a:srgbClr val="FFFFFF"/>
+              <a:defRPr sz="1125" b="1">
+                <a:solidFill>
+                  <a:srgbClr val="2C6E73"/>
                 </a:solidFill>
                 <a:latin typeface="Arial"/>
                 <a:ea typeface="Arial"/>
@@ -8336,9 +8338,9 @@
               </a:defRPr>
             </a:pPr>
             <a:r>
-              <a:rPr sz="1350" b="1">
-                <a:solidFill>
-                  <a:srgbClr val="FFFFFF"/>
+              <a:rPr sz="1125" b="1">
+                <a:solidFill>
+                  <a:srgbClr val="2C6E73"/>
                 </a:solidFill>
                 <a:latin typeface="Arial"/>
                 <a:ea typeface="Arial"/>
@@ -8354,19 +8356,19 @@
           <p:cNvPr id="13" name="">
             <a:extLst xmlns:a="http://schemas.openxmlformats.org/drawingml/2006/main">
               <a:ext uri="{FF2B5EF4-FFF2-40B4-BE49-F238E27FC236}">
-                <a16:creationId xmlns:a16="http://schemas.microsoft.com/office/drawing/2014/main" id="{BD4344DF-2B14-45BD-8F08-DD0B7985837A}"/>
-              </a:ext>
-            </a:extLst>
-          </p:cNvPr>
-          <p:cNvSpPr>
-            <a:spLocks xmlns:a="http://schemas.openxmlformats.org/drawingml/2006/main" noGrp="1"/>
-          </p:cNvSpPr>
-          <p:nvPr/>
-        </p:nvSpPr>
-        <p:spPr>
-          <a:xfrm xmlns:a="http://schemas.openxmlformats.org/drawingml/2006/main">
-            <a:off x="1714500" y="2181225"/>
-            <a:ext cx="9429750" cy="609600"/>
+                <a16:creationId xmlns:a16="http://schemas.microsoft.com/office/drawing/2014/main" id="{19E13B88-A16A-4755-A0A6-96E8BA748D7D}"/>
+              </a:ext>
+            </a:extLst>
+          </p:cNvPr>
+          <p:cNvSpPr>
+            <a:spLocks xmlns:a="http://schemas.openxmlformats.org/drawingml/2006/main" noGrp="1"/>
+          </p:cNvSpPr>
+          <p:nvPr/>
+        </p:nvSpPr>
+        <p:spPr>
+          <a:xfrm xmlns:a="http://schemas.openxmlformats.org/drawingml/2006/main">
+            <a:off x="1714500" y="2114550"/>
+            <a:ext cx="9525000" cy="809625"/>
           </a:xfrm>
           <a:prstGeom xmlns:a="http://schemas.openxmlformats.org/drawingml/2006/main" prst="rect">
             <a:avLst/>
@@ -8383,7 +8385,7 @@
           <a:lstStyle xmlns:a="http://schemas.openxmlformats.org/drawingml/2006/main"/>
           <a:p xmlns:a="http://schemas.openxmlformats.org/drawingml/2006/main">
             <a:pPr algn="l">
-              <a:defRPr sz="1500" b="0">
+              <a:defRPr sz="1725" b="0">
                 <a:solidFill>
                   <a:srgbClr val="17253A"/>
                 </a:solidFill>
@@ -8393,7 +8395,7 @@
               </a:defRPr>
             </a:pPr>
             <a:r>
-              <a:rPr sz="1500" b="0">
+              <a:rPr sz="1725" b="0">
                 <a:solidFill>
                   <a:srgbClr val="17253A"/>
                 </a:solidFill>
@@ -8401,7 +8403,7 @@
                 <a:ea typeface="Arial"/>
                 <a:cs typeface="Arial"/>
               </a:rPr>
-              <a:t>Identify the structure: Mark known properties and angle facts on the diagram.</a:t>
+              <a:t>One angle = 68°</a:t>
             </a:r>
           </a:p>
         </p:txBody>
@@ -8411,28 +8413,30 @@
           <p:cNvPr id="14" name="">
             <a:extLst xmlns:a="http://schemas.openxmlformats.org/drawingml/2006/main">
               <a:ext uri="{FF2B5EF4-FFF2-40B4-BE49-F238E27FC236}">
-                <a16:creationId xmlns:a16="http://schemas.microsoft.com/office/drawing/2014/main" id="{29DD24BB-DF7B-41D9-86F4-1A06E01CEF69}"/>
-              </a:ext>
-            </a:extLst>
-          </p:cNvPr>
-          <p:cNvSpPr>
-            <a:spLocks xmlns:a="http://schemas.openxmlformats.org/drawingml/2006/main" noGrp="1"/>
-          </p:cNvSpPr>
-          <p:nvPr/>
-        </p:nvSpPr>
-        <p:spPr>
-          <a:xfrm xmlns:a="http://schemas.openxmlformats.org/drawingml/2006/main">
-            <a:off x="1000125" y="2990850"/>
-            <a:ext cx="476250" cy="476250"/>
-          </a:xfrm>
-          <a:prstGeom xmlns:a="http://schemas.openxmlformats.org/drawingml/2006/main" prst="ellipse">
+                <a16:creationId xmlns:a16="http://schemas.microsoft.com/office/drawing/2014/main" id="{56C52607-1A18-4D60-9D6F-6BC96A53F2BD}"/>
+              </a:ext>
+            </a:extLst>
+          </p:cNvPr>
+          <p:cNvSpPr>
+            <a:spLocks xmlns:a="http://schemas.openxmlformats.org/drawingml/2006/main" noGrp="1"/>
+          </p:cNvSpPr>
+          <p:nvPr/>
+        </p:nvSpPr>
+        <p:spPr>
+          <a:xfrm xmlns:a="http://schemas.openxmlformats.org/drawingml/2006/main">
+            <a:off x="1714500" y="2943225"/>
+            <a:ext cx="9334500" cy="9525"/>
+          </a:xfrm>
+          <a:prstGeom xmlns:a="http://schemas.openxmlformats.org/drawingml/2006/main" prst="rect">
             <a:avLst/>
           </a:prstGeom>
           <a:solidFill xmlns:a="http://schemas.openxmlformats.org/drawingml/2006/main">
-            <a:srgbClr val="2C6E73"/>
+            <a:srgbClr val="D9E0E6"/>
           </a:solidFill>
           <a:ln xmlns:a="http://schemas.openxmlformats.org/drawingml/2006/main" w="0">
-            <a:noFill/>
+            <a:solidFill>
+              <a:srgbClr val="D9E0E6"/>
+            </a:solidFill>
           </a:ln>
         </p:spPr>
       </p:sp>
@@ -8441,19 +8445,19 @@
           <p:cNvPr id="15" name="">
             <a:extLst xmlns:a="http://schemas.openxmlformats.org/drawingml/2006/main">
               <a:ext uri="{FF2B5EF4-FFF2-40B4-BE49-F238E27FC236}">
-                <a16:creationId xmlns:a16="http://schemas.microsoft.com/office/drawing/2014/main" id="{24EA9243-F92A-43CC-8DDA-F179B462C5CD}"/>
-              </a:ext>
-            </a:extLst>
-          </p:cNvPr>
-          <p:cNvSpPr>
-            <a:spLocks xmlns:a="http://schemas.openxmlformats.org/drawingml/2006/main" noGrp="1"/>
-          </p:cNvSpPr>
-          <p:nvPr/>
-        </p:nvSpPr>
-        <p:spPr>
-          <a:xfrm xmlns:a="http://schemas.openxmlformats.org/drawingml/2006/main">
-            <a:off x="1000125" y="3019425"/>
-            <a:ext cx="476250" cy="419100"/>
+                <a16:creationId xmlns:a16="http://schemas.microsoft.com/office/drawing/2014/main" id="{917A6E45-AB5C-4AF5-B7D2-3BD1290043D6}"/>
+              </a:ext>
+            </a:extLst>
+          </p:cNvPr>
+          <p:cNvSpPr>
+            <a:spLocks xmlns:a="http://schemas.openxmlformats.org/drawingml/2006/main" noGrp="1"/>
+          </p:cNvSpPr>
+          <p:nvPr/>
+        </p:nvSpPr>
+        <p:spPr>
+          <a:xfrm xmlns:a="http://schemas.openxmlformats.org/drawingml/2006/main">
+            <a:off x="1162050" y="3076575"/>
+            <a:ext cx="400050" cy="400050"/>
           </a:xfrm>
           <a:prstGeom xmlns:a="http://schemas.openxmlformats.org/drawingml/2006/main" prst="rect">
             <a:avLst/>
@@ -8470,9 +8474,9 @@
           <a:lstStyle xmlns:a="http://schemas.openxmlformats.org/drawingml/2006/main"/>
           <a:p xmlns:a="http://schemas.openxmlformats.org/drawingml/2006/main">
             <a:pPr algn="ctr">
-              <a:defRPr sz="1350" b="1">
-                <a:solidFill>
-                  <a:srgbClr val="FFFFFF"/>
+              <a:defRPr sz="1125" b="1">
+                <a:solidFill>
+                  <a:srgbClr val="2C6E73"/>
                 </a:solidFill>
                 <a:latin typeface="Arial"/>
                 <a:ea typeface="Arial"/>
@@ -8480,9 +8484,9 @@
               </a:defRPr>
             </a:pPr>
             <a:r>
-              <a:rPr sz="1350" b="1">
-                <a:solidFill>
-                  <a:srgbClr val="FFFFFF"/>
+              <a:rPr sz="1125" b="1">
+                <a:solidFill>
+                  <a:srgbClr val="2C6E73"/>
                 </a:solidFill>
                 <a:latin typeface="Arial"/>
                 <a:ea typeface="Arial"/>
@@ -8498,19 +8502,19 @@
           <p:cNvPr id="16" name="">
             <a:extLst xmlns:a="http://schemas.openxmlformats.org/drawingml/2006/main">
               <a:ext uri="{FF2B5EF4-FFF2-40B4-BE49-F238E27FC236}">
-                <a16:creationId xmlns:a16="http://schemas.microsoft.com/office/drawing/2014/main" id="{BD7C7E27-3DB8-490B-8F3B-08EAC4AF30A4}"/>
-              </a:ext>
-            </a:extLst>
-          </p:cNvPr>
-          <p:cNvSpPr>
-            <a:spLocks xmlns:a="http://schemas.openxmlformats.org/drawingml/2006/main" noGrp="1"/>
-          </p:cNvSpPr>
-          <p:nvPr/>
-        </p:nvSpPr>
-        <p:spPr>
-          <a:xfrm xmlns:a="http://schemas.openxmlformats.org/drawingml/2006/main">
-            <a:off x="1714500" y="2924175"/>
-            <a:ext cx="9429750" cy="609600"/>
+                <a16:creationId xmlns:a16="http://schemas.microsoft.com/office/drawing/2014/main" id="{77C6E38E-31C1-4AA0-A0DC-DB0D08653EDE}"/>
+              </a:ext>
+            </a:extLst>
+          </p:cNvPr>
+          <p:cNvSpPr>
+            <a:spLocks xmlns:a="http://schemas.openxmlformats.org/drawingml/2006/main" noGrp="1"/>
+          </p:cNvSpPr>
+          <p:nvPr/>
+        </p:nvSpPr>
+        <p:spPr>
+          <a:xfrm xmlns:a="http://schemas.openxmlformats.org/drawingml/2006/main">
+            <a:off x="1714500" y="2990850"/>
+            <a:ext cx="9525000" cy="809625"/>
           </a:xfrm>
           <a:prstGeom xmlns:a="http://schemas.openxmlformats.org/drawingml/2006/main" prst="rect">
             <a:avLst/>
@@ -8527,7 +8531,7 @@
           <a:lstStyle xmlns:a="http://schemas.openxmlformats.org/drawingml/2006/main"/>
           <a:p xmlns:a="http://schemas.openxmlformats.org/drawingml/2006/main">
             <a:pPr algn="l">
-              <a:defRPr sz="1500" b="0">
+              <a:defRPr sz="1725" b="0">
                 <a:solidFill>
                   <a:srgbClr val="17253A"/>
                 </a:solidFill>
@@ -8537,7 +8541,7 @@
               </a:defRPr>
             </a:pPr>
             <a:r>
-              <a:rPr sz="1500" b="0">
+              <a:rPr sz="1725" b="0">
                 <a:solidFill>
                   <a:srgbClr val="17253A"/>
                 </a:solidFill>
@@ -8545,7 +8549,7 @@
                 <a:ea typeface="Arial"/>
                 <a:cs typeface="Arial"/>
               </a:rPr>
-              <a:t>Set up the method: Form a calculation using angles on a line, around a point or inside a shape.</a:t>
+              <a:t>Vertically opposite angles are equal</a:t>
             </a:r>
           </a:p>
         </p:txBody>
@@ -8555,28 +8559,30 @@
           <p:cNvPr id="17" name="">
             <a:extLst xmlns:a="http://schemas.openxmlformats.org/drawingml/2006/main">
               <a:ext uri="{FF2B5EF4-FFF2-40B4-BE49-F238E27FC236}">
-                <a16:creationId xmlns:a16="http://schemas.microsoft.com/office/drawing/2014/main" id="{4EDCE9CB-7039-42E0-B5D4-BF92E62DB3C9}"/>
-              </a:ext>
-            </a:extLst>
-          </p:cNvPr>
-          <p:cNvSpPr>
-            <a:spLocks xmlns:a="http://schemas.openxmlformats.org/drawingml/2006/main" noGrp="1"/>
-          </p:cNvSpPr>
-          <p:nvPr/>
-        </p:nvSpPr>
-        <p:spPr>
-          <a:xfrm xmlns:a="http://schemas.openxmlformats.org/drawingml/2006/main">
-            <a:off x="1000125" y="3733800"/>
-            <a:ext cx="476250" cy="476250"/>
-          </a:xfrm>
-          <a:prstGeom xmlns:a="http://schemas.openxmlformats.org/drawingml/2006/main" prst="ellipse">
+                <a16:creationId xmlns:a16="http://schemas.microsoft.com/office/drawing/2014/main" id="{E1CAE74D-3DD6-453A-BB67-EC4CF0DF59A2}"/>
+              </a:ext>
+            </a:extLst>
+          </p:cNvPr>
+          <p:cNvSpPr>
+            <a:spLocks xmlns:a="http://schemas.openxmlformats.org/drawingml/2006/main" noGrp="1"/>
+          </p:cNvSpPr>
+          <p:nvPr/>
+        </p:nvSpPr>
+        <p:spPr>
+          <a:xfrm xmlns:a="http://schemas.openxmlformats.org/drawingml/2006/main">
+            <a:off x="1714500" y="3819525"/>
+            <a:ext cx="9334500" cy="9525"/>
+          </a:xfrm>
+          <a:prstGeom xmlns:a="http://schemas.openxmlformats.org/drawingml/2006/main" prst="rect">
             <a:avLst/>
           </a:prstGeom>
           <a:solidFill xmlns:a="http://schemas.openxmlformats.org/drawingml/2006/main">
-            <a:srgbClr val="2C6E73"/>
+            <a:srgbClr val="D9E0E6"/>
           </a:solidFill>
           <a:ln xmlns:a="http://schemas.openxmlformats.org/drawingml/2006/main" w="0">
-            <a:noFill/>
+            <a:solidFill>
+              <a:srgbClr val="D9E0E6"/>
+            </a:solidFill>
           </a:ln>
         </p:spPr>
       </p:sp>
@@ -8585,19 +8591,19 @@
           <p:cNvPr id="18" name="">
             <a:extLst xmlns:a="http://schemas.openxmlformats.org/drawingml/2006/main">
               <a:ext uri="{FF2B5EF4-FFF2-40B4-BE49-F238E27FC236}">
-                <a16:creationId xmlns:a16="http://schemas.microsoft.com/office/drawing/2014/main" id="{918F6EB1-85BD-445C-BCA2-6754EAFBB709}"/>
-              </a:ext>
-            </a:extLst>
-          </p:cNvPr>
-          <p:cNvSpPr>
-            <a:spLocks xmlns:a="http://schemas.openxmlformats.org/drawingml/2006/main" noGrp="1"/>
-          </p:cNvSpPr>
-          <p:nvPr/>
-        </p:nvSpPr>
-        <p:spPr>
-          <a:xfrm xmlns:a="http://schemas.openxmlformats.org/drawingml/2006/main">
-            <a:off x="1000125" y="3762375"/>
-            <a:ext cx="476250" cy="419100"/>
+                <a16:creationId xmlns:a16="http://schemas.microsoft.com/office/drawing/2014/main" id="{A485973E-E8BF-4F5C-B897-9E1040812745}"/>
+              </a:ext>
+            </a:extLst>
+          </p:cNvPr>
+          <p:cNvSpPr>
+            <a:spLocks xmlns:a="http://schemas.openxmlformats.org/drawingml/2006/main" noGrp="1"/>
+          </p:cNvSpPr>
+          <p:nvPr/>
+        </p:nvSpPr>
+        <p:spPr>
+          <a:xfrm xmlns:a="http://schemas.openxmlformats.org/drawingml/2006/main">
+            <a:off x="1162050" y="3952875"/>
+            <a:ext cx="400050" cy="400050"/>
           </a:xfrm>
           <a:prstGeom xmlns:a="http://schemas.openxmlformats.org/drawingml/2006/main" prst="rect">
             <a:avLst/>
@@ -8614,9 +8620,9 @@
           <a:lstStyle xmlns:a="http://schemas.openxmlformats.org/drawingml/2006/main"/>
           <a:p xmlns:a="http://schemas.openxmlformats.org/drawingml/2006/main">
             <a:pPr algn="ctr">
-              <a:defRPr sz="1350" b="1">
-                <a:solidFill>
-                  <a:srgbClr val="FFFFFF"/>
+              <a:defRPr sz="1125" b="1">
+                <a:solidFill>
+                  <a:srgbClr val="2C6E73"/>
                 </a:solidFill>
                 <a:latin typeface="Arial"/>
                 <a:ea typeface="Arial"/>
@@ -8624,9 +8630,9 @@
               </a:defRPr>
             </a:pPr>
             <a:r>
-              <a:rPr sz="1350" b="1">
-                <a:solidFill>
-                  <a:srgbClr val="FFFFFF"/>
+              <a:rPr sz="1125" b="1">
+                <a:solidFill>
+                  <a:srgbClr val="2C6E73"/>
                 </a:solidFill>
                 <a:latin typeface="Arial"/>
                 <a:ea typeface="Arial"/>
@@ -8642,19 +8648,19 @@
           <p:cNvPr id="19" name="">
             <a:extLst xmlns:a="http://schemas.openxmlformats.org/drawingml/2006/main">
               <a:ext uri="{FF2B5EF4-FFF2-40B4-BE49-F238E27FC236}">
-                <a16:creationId xmlns:a16="http://schemas.microsoft.com/office/drawing/2014/main" id="{F63FA358-4034-430F-BD18-C56258BA6D3E}"/>
-              </a:ext>
-            </a:extLst>
-          </p:cNvPr>
-          <p:cNvSpPr>
-            <a:spLocks xmlns:a="http://schemas.openxmlformats.org/drawingml/2006/main" noGrp="1"/>
-          </p:cNvSpPr>
-          <p:nvPr/>
-        </p:nvSpPr>
-        <p:spPr>
-          <a:xfrm xmlns:a="http://schemas.openxmlformats.org/drawingml/2006/main">
-            <a:off x="1714500" y="3667125"/>
-            <a:ext cx="9429750" cy="609600"/>
+                <a16:creationId xmlns:a16="http://schemas.microsoft.com/office/drawing/2014/main" id="{44A12ACD-1E89-45AB-9E97-80F3E68B33FF}"/>
+              </a:ext>
+            </a:extLst>
+          </p:cNvPr>
+          <p:cNvSpPr>
+            <a:spLocks xmlns:a="http://schemas.openxmlformats.org/drawingml/2006/main" noGrp="1"/>
+          </p:cNvSpPr>
+          <p:nvPr/>
+        </p:nvSpPr>
+        <p:spPr>
+          <a:xfrm xmlns:a="http://schemas.openxmlformats.org/drawingml/2006/main">
+            <a:off x="1714500" y="3867150"/>
+            <a:ext cx="9525000" cy="809625"/>
           </a:xfrm>
           <a:prstGeom xmlns:a="http://schemas.openxmlformats.org/drawingml/2006/main" prst="rect">
             <a:avLst/>
@@ -8671,7 +8677,7 @@
           <a:lstStyle xmlns:a="http://schemas.openxmlformats.org/drawingml/2006/main"/>
           <a:p xmlns:a="http://schemas.openxmlformats.org/drawingml/2006/main">
             <a:pPr algn="l">
-              <a:defRPr sz="1500" b="0">
+              <a:defRPr sz="1725" b="0">
                 <a:solidFill>
                   <a:srgbClr val="17253A"/>
                 </a:solidFill>
@@ -8681,7 +8687,7 @@
               </a:defRPr>
             </a:pPr>
             <a:r>
-              <a:rPr sz="1500" b="0">
+              <a:rPr sz="1725" b="0">
                 <a:solidFill>
                   <a:srgbClr val="17253A"/>
                 </a:solidFill>
@@ -8689,7 +8695,7 @@
                 <a:ea typeface="Arial"/>
                 <a:cs typeface="Arial"/>
               </a:rPr>
-              <a:t>Complete the calculation: 68 degrees.</a:t>
+              <a:t>Opposite angle = 68°</a:t>
             </a:r>
           </a:p>
         </p:txBody>
@@ -8699,28 +8705,30 @@
           <p:cNvPr id="20" name="">
             <a:extLst xmlns:a="http://schemas.openxmlformats.org/drawingml/2006/main">
               <a:ext uri="{FF2B5EF4-FFF2-40B4-BE49-F238E27FC236}">
-                <a16:creationId xmlns:a16="http://schemas.microsoft.com/office/drawing/2014/main" id="{D4297550-971D-4532-B874-93C06E360B64}"/>
-              </a:ext>
-            </a:extLst>
-          </p:cNvPr>
-          <p:cNvSpPr>
-            <a:spLocks xmlns:a="http://schemas.openxmlformats.org/drawingml/2006/main" noGrp="1"/>
-          </p:cNvSpPr>
-          <p:nvPr/>
-        </p:nvSpPr>
-        <p:spPr>
-          <a:xfrm xmlns:a="http://schemas.openxmlformats.org/drawingml/2006/main">
-            <a:off x="1000125" y="4476750"/>
-            <a:ext cx="476250" cy="476250"/>
-          </a:xfrm>
-          <a:prstGeom xmlns:a="http://schemas.openxmlformats.org/drawingml/2006/main" prst="ellipse">
+                <a16:creationId xmlns:a16="http://schemas.microsoft.com/office/drawing/2014/main" id="{6B4D7E60-4EC6-45B5-9FCC-DD469A973D5A}"/>
+              </a:ext>
+            </a:extLst>
+          </p:cNvPr>
+          <p:cNvSpPr>
+            <a:spLocks xmlns:a="http://schemas.openxmlformats.org/drawingml/2006/main" noGrp="1"/>
+          </p:cNvSpPr>
+          <p:nvPr/>
+        </p:nvSpPr>
+        <p:spPr>
+          <a:xfrm xmlns:a="http://schemas.openxmlformats.org/drawingml/2006/main">
+            <a:off x="1714500" y="4695825"/>
+            <a:ext cx="9334500" cy="9525"/>
+          </a:xfrm>
+          <a:prstGeom xmlns:a="http://schemas.openxmlformats.org/drawingml/2006/main" prst="rect">
             <a:avLst/>
           </a:prstGeom>
           <a:solidFill xmlns:a="http://schemas.openxmlformats.org/drawingml/2006/main">
-            <a:srgbClr val="2C6E73"/>
+            <a:srgbClr val="D9E0E6"/>
           </a:solidFill>
           <a:ln xmlns:a="http://schemas.openxmlformats.org/drawingml/2006/main" w="0">
-            <a:noFill/>
+            <a:solidFill>
+              <a:srgbClr val="D9E0E6"/>
+            </a:solidFill>
           </a:ln>
         </p:spPr>
       </p:sp>
@@ -8729,19 +8737,19 @@
           <p:cNvPr id="21" name="">
             <a:extLst xmlns:a="http://schemas.openxmlformats.org/drawingml/2006/main">
               <a:ext uri="{FF2B5EF4-FFF2-40B4-BE49-F238E27FC236}">
-                <a16:creationId xmlns:a16="http://schemas.microsoft.com/office/drawing/2014/main" id="{A13A013E-0AA8-4E3C-86A1-2F17B44721D1}"/>
-              </a:ext>
-            </a:extLst>
-          </p:cNvPr>
-          <p:cNvSpPr>
-            <a:spLocks xmlns:a="http://schemas.openxmlformats.org/drawingml/2006/main" noGrp="1"/>
-          </p:cNvSpPr>
-          <p:nvPr/>
-        </p:nvSpPr>
-        <p:spPr>
-          <a:xfrm xmlns:a="http://schemas.openxmlformats.org/drawingml/2006/main">
-            <a:off x="1000125" y="4505325"/>
-            <a:ext cx="476250" cy="419100"/>
+                <a16:creationId xmlns:a16="http://schemas.microsoft.com/office/drawing/2014/main" id="{3D405912-05D5-44EB-B77E-6261DD4C0067}"/>
+              </a:ext>
+            </a:extLst>
+          </p:cNvPr>
+          <p:cNvSpPr>
+            <a:spLocks xmlns:a="http://schemas.openxmlformats.org/drawingml/2006/main" noGrp="1"/>
+          </p:cNvSpPr>
+          <p:nvPr/>
+        </p:nvSpPr>
+        <p:spPr>
+          <a:xfrm xmlns:a="http://schemas.openxmlformats.org/drawingml/2006/main">
+            <a:off x="1162050" y="4829175"/>
+            <a:ext cx="400050" cy="400050"/>
           </a:xfrm>
           <a:prstGeom xmlns:a="http://schemas.openxmlformats.org/drawingml/2006/main" prst="rect">
             <a:avLst/>
@@ -8758,9 +8766,9 @@
           <a:lstStyle xmlns:a="http://schemas.openxmlformats.org/drawingml/2006/main"/>
           <a:p xmlns:a="http://schemas.openxmlformats.org/drawingml/2006/main">
             <a:pPr algn="ctr">
-              <a:defRPr sz="1350" b="1">
-                <a:solidFill>
-                  <a:srgbClr val="FFFFFF"/>
+              <a:defRPr sz="1125" b="1">
+                <a:solidFill>
+                  <a:srgbClr val="2F785D"/>
                 </a:solidFill>
                 <a:latin typeface="Arial"/>
                 <a:ea typeface="Arial"/>
@@ -8768,9 +8776,9 @@
               </a:defRPr>
             </a:pPr>
             <a:r>
-              <a:rPr sz="1350" b="1">
-                <a:solidFill>
-                  <a:srgbClr val="FFFFFF"/>
+              <a:rPr sz="1125" b="1">
+                <a:solidFill>
+                  <a:srgbClr val="2F785D"/>
                 </a:solidFill>
                 <a:latin typeface="Arial"/>
                 <a:ea typeface="Arial"/>
@@ -8786,19 +8794,19 @@
           <p:cNvPr id="22" name="">
             <a:extLst xmlns:a="http://schemas.openxmlformats.org/drawingml/2006/main">
               <a:ext uri="{FF2B5EF4-FFF2-40B4-BE49-F238E27FC236}">
-                <a16:creationId xmlns:a16="http://schemas.microsoft.com/office/drawing/2014/main" id="{CFF9780E-582B-4838-93A4-2619E0635D65}"/>
-              </a:ext>
-            </a:extLst>
-          </p:cNvPr>
-          <p:cNvSpPr>
-            <a:spLocks xmlns:a="http://schemas.openxmlformats.org/drawingml/2006/main" noGrp="1"/>
-          </p:cNvSpPr>
-          <p:nvPr/>
-        </p:nvSpPr>
-        <p:spPr>
-          <a:xfrm xmlns:a="http://schemas.openxmlformats.org/drawingml/2006/main">
-            <a:off x="1714500" y="4410075"/>
-            <a:ext cx="9429750" cy="609600"/>
+                <a16:creationId xmlns:a16="http://schemas.microsoft.com/office/drawing/2014/main" id="{20B7F134-2F4F-4965-B2E0-3DC2D0828022}"/>
+              </a:ext>
+            </a:extLst>
+          </p:cNvPr>
+          <p:cNvSpPr>
+            <a:spLocks xmlns:a="http://schemas.openxmlformats.org/drawingml/2006/main" noGrp="1"/>
+          </p:cNvSpPr>
+          <p:nvPr/>
+        </p:nvSpPr>
+        <p:spPr>
+          <a:xfrm xmlns:a="http://schemas.openxmlformats.org/drawingml/2006/main">
+            <a:off x="1714500" y="4743450"/>
+            <a:ext cx="9525000" cy="809625"/>
           </a:xfrm>
           <a:prstGeom xmlns:a="http://schemas.openxmlformats.org/drawingml/2006/main" prst="rect">
             <a:avLst/>
@@ -8815,7 +8823,7 @@
           <a:lstStyle xmlns:a="http://schemas.openxmlformats.org/drawingml/2006/main"/>
           <a:p xmlns:a="http://schemas.openxmlformats.org/drawingml/2006/main">
             <a:pPr algn="l">
-              <a:defRPr sz="1500" b="1">
+              <a:defRPr sz="1725" b="1">
                 <a:solidFill>
                   <a:srgbClr val="2F785D"/>
                 </a:solidFill>
@@ -8825,7 +8833,7 @@
               </a:defRPr>
             </a:pPr>
             <a:r>
-              <a:rPr sz="1500" b="1">
+              <a:rPr sz="1725" b="1">
                 <a:solidFill>
                   <a:srgbClr val="2F785D"/>
                 </a:solidFill>
@@ -8833,7 +8841,7 @@
                 <a:ea typeface="Arial"/>
                 <a:cs typeface="Arial"/>
               </a:rPr>
-              <a:t>Check the result: Check the angle size and label it with degrees.</a:t>
+              <a:t>Answer: 68°</a:t>
             </a:r>
           </a:p>
         </p:txBody>
@@ -8841,7 +8849,7 @@
     </p:spTree>
     <p:extLst>
       <p:ext uri="{BB962C8B-B14F-4D97-AF65-F5344CB8AC3E}">
-        <p14:creationId xmlns:p14="http://schemas.microsoft.com/office/powerpoint/2010/main" val="904831299"/>
+        <p14:creationId xmlns:p14="http://schemas.microsoft.com/office/powerpoint/2010/main" val="74552493"/>
       </p:ext>
     </p:extLst>
   </p:cSld>
@@ -9134,7 +9142,7 @@
           <p:cNvPr id="15" name="">
             <a:extLst xmlns:a="http://schemas.openxmlformats.org/drawingml/2006/main">
               <a:ext uri="{FF2B5EF4-FFF2-40B4-BE49-F238E27FC236}">
-                <a16:creationId xmlns:a16="http://schemas.microsoft.com/office/drawing/2014/main" id="{50317DC2-69E5-483B-BE50-EA3B4BC4A098}"/>
+                <a16:creationId xmlns:a16="http://schemas.microsoft.com/office/drawing/2014/main" id="{813E15CC-C672-4244-9063-B9709F221FFD}"/>
               </a:ext>
             </a:extLst>
           </p:cNvPr>
@@ -9166,7 +9174,7 @@
           <p:cNvPr id="2" name="">
             <a:extLst xmlns:a="http://schemas.openxmlformats.org/drawingml/2006/main">
               <a:ext uri="{FF2B5EF4-FFF2-40B4-BE49-F238E27FC236}">
-                <a16:creationId xmlns:a16="http://schemas.microsoft.com/office/drawing/2014/main" id="{A2512E70-B6DF-4A4C-A0FB-FD5F590631C1}"/>
+                <a16:creationId xmlns:a16="http://schemas.microsoft.com/office/drawing/2014/main" id="{0CA072A6-EF3F-4545-9138-03DE1A42B94E}"/>
               </a:ext>
             </a:extLst>
           </p:cNvPr>
@@ -9223,7 +9231,7 @@
           <p:cNvPr id="3" name="">
             <a:extLst xmlns:a="http://schemas.openxmlformats.org/drawingml/2006/main">
               <a:ext uri="{FF2B5EF4-FFF2-40B4-BE49-F238E27FC236}">
-                <a16:creationId xmlns:a16="http://schemas.microsoft.com/office/drawing/2014/main" id="{10E6D3E3-7EF4-4AB8-BBC5-A663857C591F}"/>
+                <a16:creationId xmlns:a16="http://schemas.microsoft.com/office/drawing/2014/main" id="{DE69C888-EF55-43EE-A38F-6CC99FD56962}"/>
               </a:ext>
             </a:extLst>
           </p:cNvPr>
@@ -9255,7 +9263,7 @@
           <p:cNvPr id="4" name="">
             <a:extLst xmlns:a="http://schemas.openxmlformats.org/drawingml/2006/main">
               <a:ext uri="{FF2B5EF4-FFF2-40B4-BE49-F238E27FC236}">
-                <a16:creationId xmlns:a16="http://schemas.microsoft.com/office/drawing/2014/main" id="{61361706-3261-4186-8DEB-9EAE428F3BFD}"/>
+                <a16:creationId xmlns:a16="http://schemas.microsoft.com/office/drawing/2014/main" id="{6FB16CAB-B541-482D-97C3-28FBA0776DB2}"/>
               </a:ext>
             </a:extLst>
           </p:cNvPr>
@@ -9312,7 +9320,7 @@
           <p:cNvPr id="5" name="">
             <a:extLst xmlns:a="http://schemas.openxmlformats.org/drawingml/2006/main">
               <a:ext uri="{FF2B5EF4-FFF2-40B4-BE49-F238E27FC236}">
-                <a16:creationId xmlns:a16="http://schemas.microsoft.com/office/drawing/2014/main" id="{8536808C-FABC-48C8-85FB-F909300241BC}"/>
+                <a16:creationId xmlns:a16="http://schemas.microsoft.com/office/drawing/2014/main" id="{7A993493-163A-4BE6-A7A8-36D116C52476}"/>
               </a:ext>
             </a:extLst>
           </p:cNvPr>
@@ -9369,7 +9377,7 @@
           <p:cNvPr id="6" name="">
             <a:extLst xmlns:a="http://schemas.openxmlformats.org/drawingml/2006/main">
               <a:ext uri="{FF2B5EF4-FFF2-40B4-BE49-F238E27FC236}">
-                <a16:creationId xmlns:a16="http://schemas.microsoft.com/office/drawing/2014/main" id="{818E4D22-FE3E-48F3-8819-DF760F12B34A}"/>
+                <a16:creationId xmlns:a16="http://schemas.microsoft.com/office/drawing/2014/main" id="{26DD9C53-1FB0-41A3-A260-6C2A605CED0E}"/>
               </a:ext>
             </a:extLst>
           </p:cNvPr>
@@ -9426,7 +9434,7 @@
           <p:cNvPr id="7" name="">
             <a:extLst xmlns:a="http://schemas.openxmlformats.org/drawingml/2006/main">
               <a:ext uri="{FF2B5EF4-FFF2-40B4-BE49-F238E27FC236}">
-                <a16:creationId xmlns:a16="http://schemas.microsoft.com/office/drawing/2014/main" id="{B54B691F-54F5-4A56-A3A5-3DF33F1D8B1C}"/>
+                <a16:creationId xmlns:a16="http://schemas.microsoft.com/office/drawing/2014/main" id="{908992DE-7600-41C7-B7BA-AF0091EA71A0}"/>
               </a:ext>
             </a:extLst>
           </p:cNvPr>
@@ -9458,7 +9466,7 @@
           <p:cNvPr id="8" name="">
             <a:extLst xmlns:a="http://schemas.openxmlformats.org/drawingml/2006/main">
               <a:ext uri="{FF2B5EF4-FFF2-40B4-BE49-F238E27FC236}">
-                <a16:creationId xmlns:a16="http://schemas.microsoft.com/office/drawing/2014/main" id="{2524977D-59D2-4182-B9ED-E5AD382BE164}"/>
+                <a16:creationId xmlns:a16="http://schemas.microsoft.com/office/drawing/2014/main" id="{A272E020-00F9-448E-A86F-50A5F554B269}"/>
               </a:ext>
             </a:extLst>
           </p:cNvPr>
@@ -9515,7 +9523,7 @@
           <p:cNvPr id="9" name="">
             <a:extLst xmlns:a="http://schemas.openxmlformats.org/drawingml/2006/main">
               <a:ext uri="{FF2B5EF4-FFF2-40B4-BE49-F238E27FC236}">
-                <a16:creationId xmlns:a16="http://schemas.microsoft.com/office/drawing/2014/main" id="{5C8A42C7-FB74-4F1C-A985-D5A86D3C4EB9}"/>
+                <a16:creationId xmlns:a16="http://schemas.microsoft.com/office/drawing/2014/main" id="{D8C2ACEE-3303-4042-BD79-7A93A947ED36}"/>
               </a:ext>
             </a:extLst>
           </p:cNvPr>
@@ -9572,7 +9580,7 @@
           <p:cNvPr id="10" name="">
             <a:extLst xmlns:a="http://schemas.openxmlformats.org/drawingml/2006/main">
               <a:ext uri="{FF2B5EF4-FFF2-40B4-BE49-F238E27FC236}">
-                <a16:creationId xmlns:a16="http://schemas.microsoft.com/office/drawing/2014/main" id="{7AB8A158-8513-42AA-83D4-E875CD93B899}"/>
+                <a16:creationId xmlns:a16="http://schemas.microsoft.com/office/drawing/2014/main" id="{79E7035C-83C9-4992-9D80-F543FC700C4C}"/>
               </a:ext>
             </a:extLst>
           </p:cNvPr>
@@ -9629,7 +9637,7 @@
           <p:cNvPr id="11" name="">
             <a:extLst xmlns:a="http://schemas.openxmlformats.org/drawingml/2006/main">
               <a:ext uri="{FF2B5EF4-FFF2-40B4-BE49-F238E27FC236}">
-                <a16:creationId xmlns:a16="http://schemas.microsoft.com/office/drawing/2014/main" id="{689EFDA5-1017-479A-B7FE-5C83974C87D8}"/>
+                <a16:creationId xmlns:a16="http://schemas.microsoft.com/office/drawing/2014/main" id="{A8511BC5-A79D-4B5E-96B5-235F0AB17685}"/>
               </a:ext>
             </a:extLst>
           </p:cNvPr>
@@ -9686,7 +9694,7 @@
           <p:cNvPr id="12" name="">
             <a:extLst xmlns:a="http://schemas.openxmlformats.org/drawingml/2006/main">
               <a:ext uri="{FF2B5EF4-FFF2-40B4-BE49-F238E27FC236}">
-                <a16:creationId xmlns:a16="http://schemas.microsoft.com/office/drawing/2014/main" id="{1F153226-8741-4BC0-9C55-2F6B84878A2A}"/>
+                <a16:creationId xmlns:a16="http://schemas.microsoft.com/office/drawing/2014/main" id="{B3B900BE-241B-4BB4-A43A-33E1B236529C}"/>
               </a:ext>
             </a:extLst>
           </p:cNvPr>
@@ -9718,7 +9726,7 @@
           <p:cNvPr id="13" name="">
             <a:extLst xmlns:a="http://schemas.openxmlformats.org/drawingml/2006/main">
               <a:ext uri="{FF2B5EF4-FFF2-40B4-BE49-F238E27FC236}">
-                <a16:creationId xmlns:a16="http://schemas.microsoft.com/office/drawing/2014/main" id="{391C04A3-D8C5-446C-A221-90F73C97EC81}"/>
+                <a16:creationId xmlns:a16="http://schemas.microsoft.com/office/drawing/2014/main" id="{2A609CA7-C2A9-4939-9F6D-55AB19F66221}"/>
               </a:ext>
             </a:extLst>
           </p:cNvPr>
@@ -9775,7 +9783,7 @@
           <p:cNvPr id="14" name="">
             <a:extLst xmlns:a="http://schemas.openxmlformats.org/drawingml/2006/main">
               <a:ext uri="{FF2B5EF4-FFF2-40B4-BE49-F238E27FC236}">
-                <a16:creationId xmlns:a16="http://schemas.microsoft.com/office/drawing/2014/main" id="{CDB7F03A-B3A1-4B58-9591-4F65F123804B}"/>
+                <a16:creationId xmlns:a16="http://schemas.microsoft.com/office/drawing/2014/main" id="{0564F9A6-B7B6-435D-A3AA-E6722126AFE9}"/>
               </a:ext>
             </a:extLst>
           </p:cNvPr>
@@ -9830,7 +9838,7 @@
     </p:spTree>
     <p:extLst>
       <p:ext uri="{BB962C8B-B14F-4D97-AF65-F5344CB8AC3E}">
-        <p14:creationId xmlns:p14="http://schemas.microsoft.com/office/powerpoint/2010/main" val="1642991107"/>
+        <p14:creationId xmlns:p14="http://schemas.microsoft.com/office/powerpoint/2010/main" val="51055673"/>
       </p:ext>
     </p:extLst>
   </p:cSld>
@@ -10031,7 +10039,7 @@
           <p:cNvPr id="16" name="">
             <a:extLst xmlns:a="http://schemas.openxmlformats.org/drawingml/2006/main">
               <a:ext uri="{FF2B5EF4-FFF2-40B4-BE49-F238E27FC236}">
-                <a16:creationId xmlns:a16="http://schemas.microsoft.com/office/drawing/2014/main" id="{24706E30-6062-42E9-89A7-10D93ED9A080}"/>
+                <a16:creationId xmlns:a16="http://schemas.microsoft.com/office/drawing/2014/main" id="{5E7CC074-03DF-4E58-8FC0-850C878FA520}"/>
               </a:ext>
             </a:extLst>
           </p:cNvPr>
@@ -10063,7 +10071,7 @@
           <p:cNvPr id="2" name="">
             <a:extLst xmlns:a="http://schemas.openxmlformats.org/drawingml/2006/main">
               <a:ext uri="{FF2B5EF4-FFF2-40B4-BE49-F238E27FC236}">
-                <a16:creationId xmlns:a16="http://schemas.microsoft.com/office/drawing/2014/main" id="{C75282F6-5342-4A34-AE69-19C52704D81E}"/>
+                <a16:creationId xmlns:a16="http://schemas.microsoft.com/office/drawing/2014/main" id="{15040BC4-76E4-4E0E-95E1-5B8AFDADAE5F}"/>
               </a:ext>
             </a:extLst>
           </p:cNvPr>
@@ -10120,7 +10128,7 @@
           <p:cNvPr id="3" name="">
             <a:extLst xmlns:a="http://schemas.openxmlformats.org/drawingml/2006/main">
               <a:ext uri="{FF2B5EF4-FFF2-40B4-BE49-F238E27FC236}">
-                <a16:creationId xmlns:a16="http://schemas.microsoft.com/office/drawing/2014/main" id="{D50D159A-7E88-4F3C-80B4-E00F943E0AAB}"/>
+                <a16:creationId xmlns:a16="http://schemas.microsoft.com/office/drawing/2014/main" id="{D4ACCF4B-2A5F-4AA8-9648-C25061B0D4E0}"/>
               </a:ext>
             </a:extLst>
           </p:cNvPr>
@@ -10152,7 +10160,7 @@
           <p:cNvPr id="4" name="">
             <a:extLst xmlns:a="http://schemas.openxmlformats.org/drawingml/2006/main">
               <a:ext uri="{FF2B5EF4-FFF2-40B4-BE49-F238E27FC236}">
-                <a16:creationId xmlns:a16="http://schemas.microsoft.com/office/drawing/2014/main" id="{1C875871-73E7-4CEB-8632-2C310075E850}"/>
+                <a16:creationId xmlns:a16="http://schemas.microsoft.com/office/drawing/2014/main" id="{B02F0879-5B9A-400B-B05C-60E4EE090662}"/>
               </a:ext>
             </a:extLst>
           </p:cNvPr>
@@ -10209,7 +10217,7 @@
           <p:cNvPr id="5" name="">
             <a:extLst xmlns:a="http://schemas.openxmlformats.org/drawingml/2006/main">
               <a:ext uri="{FF2B5EF4-FFF2-40B4-BE49-F238E27FC236}">
-                <a16:creationId xmlns:a16="http://schemas.microsoft.com/office/drawing/2014/main" id="{1E7DA396-36A3-42C9-B48A-566FFBCD60FF}"/>
+                <a16:creationId xmlns:a16="http://schemas.microsoft.com/office/drawing/2014/main" id="{0599B746-54D1-4AAA-8C90-1372103BADB4}"/>
               </a:ext>
             </a:extLst>
           </p:cNvPr>
@@ -10266,7 +10274,7 @@
           <p:cNvPr id="6" name="">
             <a:extLst xmlns:a="http://schemas.openxmlformats.org/drawingml/2006/main">
               <a:ext uri="{FF2B5EF4-FFF2-40B4-BE49-F238E27FC236}">
-                <a16:creationId xmlns:a16="http://schemas.microsoft.com/office/drawing/2014/main" id="{EDCED948-720D-49E5-82A4-BCC7220A1E97}"/>
+                <a16:creationId xmlns:a16="http://schemas.microsoft.com/office/drawing/2014/main" id="{BFB28A05-2D68-41C8-816E-A2B42BDDE24C}"/>
               </a:ext>
             </a:extLst>
           </p:cNvPr>
@@ -10323,7 +10331,7 @@
           <p:cNvPr id="7" name="">
             <a:extLst xmlns:a="http://schemas.openxmlformats.org/drawingml/2006/main">
               <a:ext uri="{FF2B5EF4-FFF2-40B4-BE49-F238E27FC236}">
-                <a16:creationId xmlns:a16="http://schemas.microsoft.com/office/drawing/2014/main" id="{9266A4B4-3865-4A74-A688-D03F75F7F32D}"/>
+                <a16:creationId xmlns:a16="http://schemas.microsoft.com/office/drawing/2014/main" id="{B5FB0FFA-9EE5-4B33-BA37-C96217B909A8}"/>
               </a:ext>
             </a:extLst>
           </p:cNvPr>
@@ -10355,7 +10363,7 @@
           <p:cNvPr id="8" name="">
             <a:extLst xmlns:a="http://schemas.openxmlformats.org/drawingml/2006/main">
               <a:ext uri="{FF2B5EF4-FFF2-40B4-BE49-F238E27FC236}">
-                <a16:creationId xmlns:a16="http://schemas.microsoft.com/office/drawing/2014/main" id="{DE3ACEC8-E2D7-47BF-9A30-C663662CD320}"/>
+                <a16:creationId xmlns:a16="http://schemas.microsoft.com/office/drawing/2014/main" id="{82EE99ED-629A-4BBC-87A6-FD67EE7BA6EA}"/>
               </a:ext>
             </a:extLst>
           </p:cNvPr>
@@ -10412,7 +10420,7 @@
           <p:cNvPr id="9" name="">
             <a:extLst xmlns:a="http://schemas.openxmlformats.org/drawingml/2006/main">
               <a:ext uri="{FF2B5EF4-FFF2-40B4-BE49-F238E27FC236}">
-                <a16:creationId xmlns:a16="http://schemas.microsoft.com/office/drawing/2014/main" id="{66225482-B7B6-42DD-B53D-551B3565BCCC}"/>
+                <a16:creationId xmlns:a16="http://schemas.microsoft.com/office/drawing/2014/main" id="{75B1C0B8-7600-49B4-B9AA-E8DE85CE9B44}"/>
               </a:ext>
             </a:extLst>
           </p:cNvPr>
@@ -10469,7 +10477,7 @@
           <p:cNvPr id="10" name="">
             <a:extLst xmlns:a="http://schemas.openxmlformats.org/drawingml/2006/main">
               <a:ext uri="{FF2B5EF4-FFF2-40B4-BE49-F238E27FC236}">
-                <a16:creationId xmlns:a16="http://schemas.microsoft.com/office/drawing/2014/main" id="{D724AF94-74C6-4AC0-9820-9BA8D50CA8D2}"/>
+                <a16:creationId xmlns:a16="http://schemas.microsoft.com/office/drawing/2014/main" id="{55285F3F-82B5-45A9-A1F8-804C6AF9F819}"/>
               </a:ext>
             </a:extLst>
           </p:cNvPr>
@@ -10526,7 +10534,7 @@
           <p:cNvPr id="11" name="">
             <a:extLst xmlns:a="http://schemas.openxmlformats.org/drawingml/2006/main">
               <a:ext uri="{FF2B5EF4-FFF2-40B4-BE49-F238E27FC236}">
-                <a16:creationId xmlns:a16="http://schemas.microsoft.com/office/drawing/2014/main" id="{8F35D267-303C-4288-8038-4EC13CA86857}"/>
+                <a16:creationId xmlns:a16="http://schemas.microsoft.com/office/drawing/2014/main" id="{85B63B52-985F-48B9-BD8F-FF8DF54A339C}"/>
               </a:ext>
             </a:extLst>
           </p:cNvPr>
@@ -10583,7 +10591,7 @@
           <p:cNvPr id="12" name="">
             <a:extLst xmlns:a="http://schemas.openxmlformats.org/drawingml/2006/main">
               <a:ext uri="{FF2B5EF4-FFF2-40B4-BE49-F238E27FC236}">
-                <a16:creationId xmlns:a16="http://schemas.microsoft.com/office/drawing/2014/main" id="{3CC7F0FC-7FDA-431D-9556-DE341DC5FA5B}"/>
+                <a16:creationId xmlns:a16="http://schemas.microsoft.com/office/drawing/2014/main" id="{3515E5D5-BBB8-4928-A9F6-094F71BEE8DE}"/>
               </a:ext>
             </a:extLst>
           </p:cNvPr>
@@ -10640,7 +10648,7 @@
           <p:cNvPr id="13" name="">
             <a:extLst xmlns:a="http://schemas.openxmlformats.org/drawingml/2006/main">
               <a:ext uri="{FF2B5EF4-FFF2-40B4-BE49-F238E27FC236}">
-                <a16:creationId xmlns:a16="http://schemas.microsoft.com/office/drawing/2014/main" id="{3D870AF8-C757-4988-A4BC-86491E320389}"/>
+                <a16:creationId xmlns:a16="http://schemas.microsoft.com/office/drawing/2014/main" id="{D1DBCF4F-AA81-4321-90C7-A07829A58493}"/>
               </a:ext>
             </a:extLst>
           </p:cNvPr>
@@ -10697,7 +10705,7 @@
           <p:cNvPr id="14" name="">
             <a:extLst xmlns:a="http://schemas.openxmlformats.org/drawingml/2006/main">
               <a:ext uri="{FF2B5EF4-FFF2-40B4-BE49-F238E27FC236}">
-                <a16:creationId xmlns:a16="http://schemas.microsoft.com/office/drawing/2014/main" id="{3F442F5E-B657-493A-A52D-275FB2BFB365}"/>
+                <a16:creationId xmlns:a16="http://schemas.microsoft.com/office/drawing/2014/main" id="{6DB56999-C960-46D0-81BA-5C92A08A1931}"/>
               </a:ext>
             </a:extLst>
           </p:cNvPr>
@@ -10754,7 +10762,7 @@
           <p:cNvPr id="15" name="">
             <a:extLst xmlns:a="http://schemas.openxmlformats.org/drawingml/2006/main">
               <a:ext uri="{FF2B5EF4-FFF2-40B4-BE49-F238E27FC236}">
-                <a16:creationId xmlns:a16="http://schemas.microsoft.com/office/drawing/2014/main" id="{6A4796B8-7EB7-4ABF-A8C7-4A58A8351ABB}"/>
+                <a16:creationId xmlns:a16="http://schemas.microsoft.com/office/drawing/2014/main" id="{8F56A87D-E4BB-4052-A878-F5AED40C9C26}"/>
               </a:ext>
             </a:extLst>
           </p:cNvPr>
@@ -10809,7 +10817,7 @@
     </p:spTree>
     <p:extLst>
       <p:ext uri="{BB962C8B-B14F-4D97-AF65-F5344CB8AC3E}">
-        <p14:creationId xmlns:p14="http://schemas.microsoft.com/office/powerpoint/2010/main" val="680280824"/>
+        <p14:creationId xmlns:p14="http://schemas.microsoft.com/office/powerpoint/2010/main" val="89847044"/>
       </p:ext>
     </p:extLst>
   </p:cSld>
@@ -10964,7 +10972,7 @@
           <p:cNvPr id="16" name="">
             <a:extLst xmlns:a="http://schemas.openxmlformats.org/drawingml/2006/main">
               <a:ext uri="{FF2B5EF4-FFF2-40B4-BE49-F238E27FC236}">
-                <a16:creationId xmlns:a16="http://schemas.microsoft.com/office/drawing/2014/main" id="{D78B2970-2CED-4B32-922A-FDE0BD58C058}"/>
+                <a16:creationId xmlns:a16="http://schemas.microsoft.com/office/drawing/2014/main" id="{C63DFE35-F47A-49B0-B0BC-B0361DC8CCFE}"/>
               </a:ext>
             </a:extLst>
           </p:cNvPr>
@@ -10996,7 +11004,7 @@
           <p:cNvPr id="2" name="">
             <a:extLst xmlns:a="http://schemas.openxmlformats.org/drawingml/2006/main">
               <a:ext uri="{FF2B5EF4-FFF2-40B4-BE49-F238E27FC236}">
-                <a16:creationId xmlns:a16="http://schemas.microsoft.com/office/drawing/2014/main" id="{74A25AED-2452-4B6C-926A-818E03A75135}"/>
+                <a16:creationId xmlns:a16="http://schemas.microsoft.com/office/drawing/2014/main" id="{C7EF2149-B5FC-4BAB-8F67-E3859FF6D46F}"/>
               </a:ext>
             </a:extLst>
           </p:cNvPr>
@@ -11053,7 +11061,7 @@
           <p:cNvPr id="3" name="">
             <a:extLst xmlns:a="http://schemas.openxmlformats.org/drawingml/2006/main">
               <a:ext uri="{FF2B5EF4-FFF2-40B4-BE49-F238E27FC236}">
-                <a16:creationId xmlns:a16="http://schemas.microsoft.com/office/drawing/2014/main" id="{B8C7122F-C284-4C7E-B964-767C2E4F7ABC}"/>
+                <a16:creationId xmlns:a16="http://schemas.microsoft.com/office/drawing/2014/main" id="{69A5ECA3-D60B-4F7F-8A4B-227BBA1B30CE}"/>
               </a:ext>
             </a:extLst>
           </p:cNvPr>
@@ -11085,7 +11093,7 @@
           <p:cNvPr id="4" name="">
             <a:extLst xmlns:a="http://schemas.openxmlformats.org/drawingml/2006/main">
               <a:ext uri="{FF2B5EF4-FFF2-40B4-BE49-F238E27FC236}">
-                <a16:creationId xmlns:a16="http://schemas.microsoft.com/office/drawing/2014/main" id="{98553949-3052-419B-B648-1DEBECA997D0}"/>
+                <a16:creationId xmlns:a16="http://schemas.microsoft.com/office/drawing/2014/main" id="{1562D274-F212-4631-BBCC-152E6FC0EDA5}"/>
               </a:ext>
             </a:extLst>
           </p:cNvPr>
@@ -11142,7 +11150,7 @@
           <p:cNvPr id="5" name="">
             <a:extLst xmlns:a="http://schemas.openxmlformats.org/drawingml/2006/main">
               <a:ext uri="{FF2B5EF4-FFF2-40B4-BE49-F238E27FC236}">
-                <a16:creationId xmlns:a16="http://schemas.microsoft.com/office/drawing/2014/main" id="{6D4DF003-E297-4FC0-BD76-24939C635E9B}"/>
+                <a16:creationId xmlns:a16="http://schemas.microsoft.com/office/drawing/2014/main" id="{8060C712-8520-485D-A304-C2882174ECD7}"/>
               </a:ext>
             </a:extLst>
           </p:cNvPr>
@@ -11199,7 +11207,7 @@
           <p:cNvPr id="6" name="">
             <a:extLst xmlns:a="http://schemas.openxmlformats.org/drawingml/2006/main">
               <a:ext uri="{FF2B5EF4-FFF2-40B4-BE49-F238E27FC236}">
-                <a16:creationId xmlns:a16="http://schemas.microsoft.com/office/drawing/2014/main" id="{A7D0423C-7E80-43AC-95EF-73C3F491DC87}"/>
+                <a16:creationId xmlns:a16="http://schemas.microsoft.com/office/drawing/2014/main" id="{0B533305-7DCB-4EF9-956B-20F9593AF177}"/>
               </a:ext>
             </a:extLst>
           </p:cNvPr>
@@ -11256,7 +11264,7 @@
           <p:cNvPr id="7" name="">
             <a:extLst xmlns:a="http://schemas.openxmlformats.org/drawingml/2006/main">
               <a:ext uri="{FF2B5EF4-FFF2-40B4-BE49-F238E27FC236}">
-                <a16:creationId xmlns:a16="http://schemas.microsoft.com/office/drawing/2014/main" id="{F80D963B-B8CF-47BB-9A66-005845A9FD1F}"/>
+                <a16:creationId xmlns:a16="http://schemas.microsoft.com/office/drawing/2014/main" id="{2DAAB115-F0C3-4024-948C-63640B93C8D7}"/>
               </a:ext>
             </a:extLst>
           </p:cNvPr>
@@ -11288,7 +11296,7 @@
           <p:cNvPr id="8" name="">
             <a:extLst xmlns:a="http://schemas.openxmlformats.org/drawingml/2006/main">
               <a:ext uri="{FF2B5EF4-FFF2-40B4-BE49-F238E27FC236}">
-                <a16:creationId xmlns:a16="http://schemas.microsoft.com/office/drawing/2014/main" id="{F7A78543-E777-4778-8415-A4D1594160B0}"/>
+                <a16:creationId xmlns:a16="http://schemas.microsoft.com/office/drawing/2014/main" id="{D5B9449A-49BB-4B44-AD37-E658EF8F38B0}"/>
               </a:ext>
             </a:extLst>
           </p:cNvPr>
@@ -11345,7 +11353,7 @@
           <p:cNvPr id="9" name="">
             <a:extLst xmlns:a="http://schemas.openxmlformats.org/drawingml/2006/main">
               <a:ext uri="{FF2B5EF4-FFF2-40B4-BE49-F238E27FC236}">
-                <a16:creationId xmlns:a16="http://schemas.microsoft.com/office/drawing/2014/main" id="{AB317FA8-072F-4C8A-97F9-E1E735CD0CD9}"/>
+                <a16:creationId xmlns:a16="http://schemas.microsoft.com/office/drawing/2014/main" id="{FC4690B9-5250-46B2-A4A0-45753168A0AB}"/>
               </a:ext>
             </a:extLst>
           </p:cNvPr>
@@ -11406,7 +11414,7 @@
           <p:nvPr/>
         </p:nvPicPr>
         <p:blipFill>
-          <a:blip xmlns:r="http://schemas.openxmlformats.org/officeDocument/2006/relationships" xmlns:a="http://schemas.openxmlformats.org/drawingml/2006/main" r:embed="Rac3e8ad2199d46d4"/>
+          <a:blip xmlns:r="http://schemas.openxmlformats.org/officeDocument/2006/relationships" xmlns:a="http://schemas.openxmlformats.org/drawingml/2006/main" r:embed="R7ad5b13076f94018"/>
           <a:stretch xmlns:a="http://schemas.openxmlformats.org/drawingml/2006/main"/>
         </p:blipFill>
         <p:spPr>
@@ -11424,7 +11432,7 @@
           <p:cNvPr id="11" name="">
             <a:extLst xmlns:a="http://schemas.openxmlformats.org/drawingml/2006/main">
               <a:ext uri="{FF2B5EF4-FFF2-40B4-BE49-F238E27FC236}">
-                <a16:creationId xmlns:a16="http://schemas.microsoft.com/office/drawing/2014/main" id="{83E72878-D18B-4917-AD2A-BF6BAC2156CF}"/>
+                <a16:creationId xmlns:a16="http://schemas.microsoft.com/office/drawing/2014/main" id="{6C227858-D757-4881-BBAB-520D02CF4F86}"/>
               </a:ext>
             </a:extLst>
           </p:cNvPr>
@@ -11481,7 +11489,7 @@
           <p:cNvPr id="12" name="">
             <a:extLst xmlns:a="http://schemas.openxmlformats.org/drawingml/2006/main">
               <a:ext uri="{FF2B5EF4-FFF2-40B4-BE49-F238E27FC236}">
-                <a16:creationId xmlns:a16="http://schemas.microsoft.com/office/drawing/2014/main" id="{22B786EA-B90D-4CF8-97A5-7E74FC84D997}"/>
+                <a16:creationId xmlns:a16="http://schemas.microsoft.com/office/drawing/2014/main" id="{3A71550C-F259-4834-AE22-29DA332402EA}"/>
               </a:ext>
             </a:extLst>
           </p:cNvPr>
@@ -11538,7 +11546,7 @@
           <p:cNvPr id="13" name="">
             <a:extLst xmlns:a="http://schemas.openxmlformats.org/drawingml/2006/main">
               <a:ext uri="{FF2B5EF4-FFF2-40B4-BE49-F238E27FC236}">
-                <a16:creationId xmlns:a16="http://schemas.microsoft.com/office/drawing/2014/main" id="{B659AB47-D0AC-4123-B37B-77255273EE96}"/>
+                <a16:creationId xmlns:a16="http://schemas.microsoft.com/office/drawing/2014/main" id="{90C8548E-CB9E-490E-A23A-0C6E2B0899F7}"/>
               </a:ext>
             </a:extLst>
           </p:cNvPr>
@@ -11570,7 +11578,7 @@
           <p:cNvPr id="14" name="">
             <a:extLst xmlns:a="http://schemas.openxmlformats.org/drawingml/2006/main">
               <a:ext uri="{FF2B5EF4-FFF2-40B4-BE49-F238E27FC236}">
-                <a16:creationId xmlns:a16="http://schemas.microsoft.com/office/drawing/2014/main" id="{3DE2352D-341C-4EF8-82BA-83C238584D2A}"/>
+                <a16:creationId xmlns:a16="http://schemas.microsoft.com/office/drawing/2014/main" id="{E806C0F8-FDDB-4B38-867F-5956F6576D08}"/>
               </a:ext>
             </a:extLst>
           </p:cNvPr>
@@ -11627,7 +11635,7 @@
           <p:cNvPr id="15" name="">
             <a:extLst xmlns:a="http://schemas.openxmlformats.org/drawingml/2006/main">
               <a:ext uri="{FF2B5EF4-FFF2-40B4-BE49-F238E27FC236}">
-                <a16:creationId xmlns:a16="http://schemas.microsoft.com/office/drawing/2014/main" id="{2E5C059F-69A1-4E68-A2AE-9ACC04E410DE}"/>
+                <a16:creationId xmlns:a16="http://schemas.microsoft.com/office/drawing/2014/main" id="{8A543690-E2EF-4EF2-947B-3E55EE0B10B3}"/>
               </a:ext>
             </a:extLst>
           </p:cNvPr>
@@ -11682,7 +11690,7 @@
     </p:spTree>
     <p:extLst>
       <p:ext uri="{BB962C8B-B14F-4D97-AF65-F5344CB8AC3E}">
-        <p14:creationId xmlns:p14="http://schemas.microsoft.com/office/powerpoint/2010/main" val="939607778"/>
+        <p14:creationId xmlns:p14="http://schemas.microsoft.com/office/powerpoint/2010/main" val="632325191"/>
       </p:ext>
     </p:extLst>
   </p:cSld>
@@ -11837,7 +11845,7 @@
           <p:cNvPr id="23" name="">
             <a:extLst xmlns:a="http://schemas.openxmlformats.org/drawingml/2006/main">
               <a:ext uri="{FF2B5EF4-FFF2-40B4-BE49-F238E27FC236}">
-                <a16:creationId xmlns:a16="http://schemas.microsoft.com/office/drawing/2014/main" id="{5C42D606-366D-48C3-833E-653152CCC0C0}"/>
+                <a16:creationId xmlns:a16="http://schemas.microsoft.com/office/drawing/2014/main" id="{86619BD4-D0E0-4C65-9760-F6341CA11D31}"/>
               </a:ext>
             </a:extLst>
           </p:cNvPr>
@@ -11869,7 +11877,7 @@
           <p:cNvPr id="2" name="">
             <a:extLst xmlns:a="http://schemas.openxmlformats.org/drawingml/2006/main">
               <a:ext uri="{FF2B5EF4-FFF2-40B4-BE49-F238E27FC236}">
-                <a16:creationId xmlns:a16="http://schemas.microsoft.com/office/drawing/2014/main" id="{6D180F8F-CA87-4029-9A1D-14D2E8F612CB}"/>
+                <a16:creationId xmlns:a16="http://schemas.microsoft.com/office/drawing/2014/main" id="{77B0A092-845D-4173-A383-3F887F46496B}"/>
               </a:ext>
             </a:extLst>
           </p:cNvPr>
@@ -11926,7 +11934,7 @@
           <p:cNvPr id="3" name="">
             <a:extLst xmlns:a="http://schemas.openxmlformats.org/drawingml/2006/main">
               <a:ext uri="{FF2B5EF4-FFF2-40B4-BE49-F238E27FC236}">
-                <a16:creationId xmlns:a16="http://schemas.microsoft.com/office/drawing/2014/main" id="{701C82E5-0261-4CDF-9A18-C47217C40D15}"/>
+                <a16:creationId xmlns:a16="http://schemas.microsoft.com/office/drawing/2014/main" id="{C9034D14-9AFE-4231-BD11-FD65EF26CA31}"/>
               </a:ext>
             </a:extLst>
           </p:cNvPr>
@@ -11958,7 +11966,7 @@
           <p:cNvPr id="4" name="">
             <a:extLst xmlns:a="http://schemas.openxmlformats.org/drawingml/2006/main">
               <a:ext uri="{FF2B5EF4-FFF2-40B4-BE49-F238E27FC236}">
-                <a16:creationId xmlns:a16="http://schemas.microsoft.com/office/drawing/2014/main" id="{E3DB7BA0-F07C-4D0B-A151-AEC1C97DB6B1}"/>
+                <a16:creationId xmlns:a16="http://schemas.microsoft.com/office/drawing/2014/main" id="{99EB194E-EF7B-4498-97E2-3BDC2528E44C}"/>
               </a:ext>
             </a:extLst>
           </p:cNvPr>
@@ -12015,7 +12023,7 @@
           <p:cNvPr id="5" name="">
             <a:extLst xmlns:a="http://schemas.openxmlformats.org/drawingml/2006/main">
               <a:ext uri="{FF2B5EF4-FFF2-40B4-BE49-F238E27FC236}">
-                <a16:creationId xmlns:a16="http://schemas.microsoft.com/office/drawing/2014/main" id="{A7C1E666-E9DD-4F01-BBD8-5DCB280AD50C}"/>
+                <a16:creationId xmlns:a16="http://schemas.microsoft.com/office/drawing/2014/main" id="{355D6B3B-AE8B-4349-9A7F-9D7E4B42A38B}"/>
               </a:ext>
             </a:extLst>
           </p:cNvPr>
@@ -12072,7 +12080,7 @@
           <p:cNvPr id="6" name="">
             <a:extLst xmlns:a="http://schemas.openxmlformats.org/drawingml/2006/main">
               <a:ext uri="{FF2B5EF4-FFF2-40B4-BE49-F238E27FC236}">
-                <a16:creationId xmlns:a16="http://schemas.microsoft.com/office/drawing/2014/main" id="{8C7FAA92-5DF4-4D00-9F16-D2004C806E8D}"/>
+                <a16:creationId xmlns:a16="http://schemas.microsoft.com/office/drawing/2014/main" id="{EA8524F5-CB10-4314-993E-692554CA169D}"/>
               </a:ext>
             </a:extLst>
           </p:cNvPr>
@@ -12129,7 +12137,7 @@
           <p:cNvPr id="7" name="">
             <a:extLst xmlns:a="http://schemas.openxmlformats.org/drawingml/2006/main">
               <a:ext uri="{FF2B5EF4-FFF2-40B4-BE49-F238E27FC236}">
-                <a16:creationId xmlns:a16="http://schemas.microsoft.com/office/drawing/2014/main" id="{B6DC4BAE-684D-4303-BC9E-597C49D6FF40}"/>
+                <a16:creationId xmlns:a16="http://schemas.microsoft.com/office/drawing/2014/main" id="{5EDEC7B5-BAA5-4A7B-B86A-E18C9525CCEB}"/>
               </a:ext>
             </a:extLst>
           </p:cNvPr>
@@ -12161,7 +12169,7 @@
           <p:cNvPr id="8" name="">
             <a:extLst xmlns:a="http://schemas.openxmlformats.org/drawingml/2006/main">
               <a:ext uri="{FF2B5EF4-FFF2-40B4-BE49-F238E27FC236}">
-                <a16:creationId xmlns:a16="http://schemas.microsoft.com/office/drawing/2014/main" id="{325E3B46-028F-4F83-867F-695B235FCE77}"/>
+                <a16:creationId xmlns:a16="http://schemas.microsoft.com/office/drawing/2014/main" id="{BBF81F0A-E00A-4318-BE69-81AA9E5F5025}"/>
               </a:ext>
             </a:extLst>
           </p:cNvPr>
@@ -12218,7 +12226,7 @@
           <p:cNvPr id="9" name="">
             <a:extLst xmlns:a="http://schemas.openxmlformats.org/drawingml/2006/main">
               <a:ext uri="{FF2B5EF4-FFF2-40B4-BE49-F238E27FC236}">
-                <a16:creationId xmlns:a16="http://schemas.microsoft.com/office/drawing/2014/main" id="{ACC7F693-7114-4B5C-896C-E0FC0BB780AD}"/>
+                <a16:creationId xmlns:a16="http://schemas.microsoft.com/office/drawing/2014/main" id="{A49439EB-3557-419B-BB20-F567142C0E8D}"/>
               </a:ext>
             </a:extLst>
           </p:cNvPr>
@@ -12275,7 +12283,7 @@
           <p:cNvPr id="10" name="">
             <a:extLst xmlns:a="http://schemas.openxmlformats.org/drawingml/2006/main">
               <a:ext uri="{FF2B5EF4-FFF2-40B4-BE49-F238E27FC236}">
-                <a16:creationId xmlns:a16="http://schemas.microsoft.com/office/drawing/2014/main" id="{C49FDC30-B2AC-469E-B7D1-EA17E81EA2B6}"/>
+                <a16:creationId xmlns:a16="http://schemas.microsoft.com/office/drawing/2014/main" id="{C0D3BCAF-6C2B-4729-AD7D-D34B4C240C3C}"/>
               </a:ext>
             </a:extLst>
           </p:cNvPr>
@@ -12309,7 +12317,7 @@
           <p:cNvPr id="11" name="">
             <a:extLst xmlns:a="http://schemas.openxmlformats.org/drawingml/2006/main">
               <a:ext uri="{FF2B5EF4-FFF2-40B4-BE49-F238E27FC236}">
-                <a16:creationId xmlns:a16="http://schemas.microsoft.com/office/drawing/2014/main" id="{52870893-22DF-4114-84AA-018136CB6B57}"/>
+                <a16:creationId xmlns:a16="http://schemas.microsoft.com/office/drawing/2014/main" id="{E451E226-135A-4E0B-B099-2102A48D27E6}"/>
               </a:ext>
             </a:extLst>
           </p:cNvPr>
@@ -12341,7 +12349,7 @@
           <p:cNvPr id="12" name="">
             <a:extLst xmlns:a="http://schemas.openxmlformats.org/drawingml/2006/main">
               <a:ext uri="{FF2B5EF4-FFF2-40B4-BE49-F238E27FC236}">
-                <a16:creationId xmlns:a16="http://schemas.microsoft.com/office/drawing/2014/main" id="{34B4369F-717D-4B10-8D89-B8E5E6A80629}"/>
+                <a16:creationId xmlns:a16="http://schemas.microsoft.com/office/drawing/2014/main" id="{77E8147D-6422-4FAA-82BA-3F5F73EA93A4}"/>
               </a:ext>
             </a:extLst>
           </p:cNvPr>
@@ -12398,7 +12406,7 @@
           <p:cNvPr id="13" name="">
             <a:extLst xmlns:a="http://schemas.openxmlformats.org/drawingml/2006/main">
               <a:ext uri="{FF2B5EF4-FFF2-40B4-BE49-F238E27FC236}">
-                <a16:creationId xmlns:a16="http://schemas.microsoft.com/office/drawing/2014/main" id="{306955BF-0864-4D43-AC8E-8FB3E6CBA769}"/>
+                <a16:creationId xmlns:a16="http://schemas.microsoft.com/office/drawing/2014/main" id="{17DE72F2-8058-4A58-9912-684B6D7933CC}"/>
               </a:ext>
             </a:extLst>
           </p:cNvPr>
@@ -12455,7 +12463,7 @@
           <p:cNvPr id="14" name="">
             <a:extLst xmlns:a="http://schemas.openxmlformats.org/drawingml/2006/main">
               <a:ext uri="{FF2B5EF4-FFF2-40B4-BE49-F238E27FC236}">
-                <a16:creationId xmlns:a16="http://schemas.microsoft.com/office/drawing/2014/main" id="{4132DBC8-A677-4587-BC14-AA4A6E21F8D6}"/>
+                <a16:creationId xmlns:a16="http://schemas.microsoft.com/office/drawing/2014/main" id="{A2F68F18-5944-4DB7-91FC-8C2AA57B7120}"/>
               </a:ext>
             </a:extLst>
           </p:cNvPr>
@@ -12489,7 +12497,7 @@
           <p:cNvPr id="15" name="">
             <a:extLst xmlns:a="http://schemas.openxmlformats.org/drawingml/2006/main">
               <a:ext uri="{FF2B5EF4-FFF2-40B4-BE49-F238E27FC236}">
-                <a16:creationId xmlns:a16="http://schemas.microsoft.com/office/drawing/2014/main" id="{E5896726-EF6D-417D-84E7-D7CE0C1B574F}"/>
+                <a16:creationId xmlns:a16="http://schemas.microsoft.com/office/drawing/2014/main" id="{E06CAACF-1B4C-4440-803E-E30BF653F658}"/>
               </a:ext>
             </a:extLst>
           </p:cNvPr>
@@ -12521,7 +12529,7 @@
           <p:cNvPr id="16" name="">
             <a:extLst xmlns:a="http://schemas.openxmlformats.org/drawingml/2006/main">
               <a:ext uri="{FF2B5EF4-FFF2-40B4-BE49-F238E27FC236}">
-                <a16:creationId xmlns:a16="http://schemas.microsoft.com/office/drawing/2014/main" id="{EAAE33FE-1BAE-41D4-9A0B-EA8B9D9EB821}"/>
+                <a16:creationId xmlns:a16="http://schemas.microsoft.com/office/drawing/2014/main" id="{12E067B0-DEED-426C-AD88-E52EA229023D}"/>
               </a:ext>
             </a:extLst>
           </p:cNvPr>
@@ -12578,7 +12586,7 @@
           <p:cNvPr id="17" name="">
             <a:extLst xmlns:a="http://schemas.openxmlformats.org/drawingml/2006/main">
               <a:ext uri="{FF2B5EF4-FFF2-40B4-BE49-F238E27FC236}">
-                <a16:creationId xmlns:a16="http://schemas.microsoft.com/office/drawing/2014/main" id="{ACA404AC-A2D4-4A9C-982B-A7250D8F5E60}"/>
+                <a16:creationId xmlns:a16="http://schemas.microsoft.com/office/drawing/2014/main" id="{855643A5-29C7-4F32-846E-41F44941E82E}"/>
               </a:ext>
             </a:extLst>
           </p:cNvPr>
@@ -12635,7 +12643,7 @@
           <p:cNvPr id="18" name="">
             <a:extLst xmlns:a="http://schemas.openxmlformats.org/drawingml/2006/main">
               <a:ext uri="{FF2B5EF4-FFF2-40B4-BE49-F238E27FC236}">
-                <a16:creationId xmlns:a16="http://schemas.microsoft.com/office/drawing/2014/main" id="{39AAF537-EE59-416B-865E-89BFE68422AB}"/>
+                <a16:creationId xmlns:a16="http://schemas.microsoft.com/office/drawing/2014/main" id="{E70BED98-D46A-48D6-877B-ADC9FD9DD9D0}"/>
               </a:ext>
             </a:extLst>
           </p:cNvPr>
@@ -12669,7 +12677,7 @@
           <p:cNvPr id="19" name="">
             <a:extLst xmlns:a="http://schemas.openxmlformats.org/drawingml/2006/main">
               <a:ext uri="{FF2B5EF4-FFF2-40B4-BE49-F238E27FC236}">
-                <a16:creationId xmlns:a16="http://schemas.microsoft.com/office/drawing/2014/main" id="{4CCF53B5-EA8F-4494-B35E-B9E6C90413EB}"/>
+                <a16:creationId xmlns:a16="http://schemas.microsoft.com/office/drawing/2014/main" id="{3A97F937-F4BC-4ED2-9855-D1A19C7D7931}"/>
               </a:ext>
             </a:extLst>
           </p:cNvPr>
@@ -12701,7 +12709,7 @@
           <p:cNvPr id="20" name="">
             <a:extLst xmlns:a="http://schemas.openxmlformats.org/drawingml/2006/main">
               <a:ext uri="{FF2B5EF4-FFF2-40B4-BE49-F238E27FC236}">
-                <a16:creationId xmlns:a16="http://schemas.microsoft.com/office/drawing/2014/main" id="{E0C42EB4-5230-4220-9267-28DDAF187A39}"/>
+                <a16:creationId xmlns:a16="http://schemas.microsoft.com/office/drawing/2014/main" id="{310C5F60-FD48-4E80-B530-69BB0830CA65}"/>
               </a:ext>
             </a:extLst>
           </p:cNvPr>
@@ -12758,7 +12766,7 @@
           <p:cNvPr id="21" name="">
             <a:extLst xmlns:a="http://schemas.openxmlformats.org/drawingml/2006/main">
               <a:ext uri="{FF2B5EF4-FFF2-40B4-BE49-F238E27FC236}">
-                <a16:creationId xmlns:a16="http://schemas.microsoft.com/office/drawing/2014/main" id="{58B65C47-3DA4-46A6-9BED-2AF4FC6F0975}"/>
+                <a16:creationId xmlns:a16="http://schemas.microsoft.com/office/drawing/2014/main" id="{B41FEA6F-5348-4E80-8D5B-4EB6FD9EE8F6}"/>
               </a:ext>
             </a:extLst>
           </p:cNvPr>
@@ -12815,7 +12823,7 @@
           <p:cNvPr id="22" name="">
             <a:extLst xmlns:a="http://schemas.openxmlformats.org/drawingml/2006/main">
               <a:ext uri="{FF2B5EF4-FFF2-40B4-BE49-F238E27FC236}">
-                <a16:creationId xmlns:a16="http://schemas.microsoft.com/office/drawing/2014/main" id="{878AF7FE-0514-4EA4-AB11-1728C1FFDCF3}"/>
+                <a16:creationId xmlns:a16="http://schemas.microsoft.com/office/drawing/2014/main" id="{478C99F2-A32C-461E-81B1-B626F2D2CF47}"/>
               </a:ext>
             </a:extLst>
           </p:cNvPr>
@@ -12870,7 +12878,7 @@
     </p:spTree>
     <p:extLst>
       <p:ext uri="{BB962C8B-B14F-4D97-AF65-F5344CB8AC3E}">
-        <p14:creationId xmlns:p14="http://schemas.microsoft.com/office/powerpoint/2010/main" val="1023990106"/>
+        <p14:creationId xmlns:p14="http://schemas.microsoft.com/office/powerpoint/2010/main" val="1072156221"/>
       </p:ext>
     </p:extLst>
   </p:cSld>
@@ -13071,7 +13079,7 @@
           <p:cNvPr id="22" name="">
             <a:extLst xmlns:a="http://schemas.openxmlformats.org/drawingml/2006/main">
               <a:ext uri="{FF2B5EF4-FFF2-40B4-BE49-F238E27FC236}">
-                <a16:creationId xmlns:a16="http://schemas.microsoft.com/office/drawing/2014/main" id="{C3E724FE-5A11-427B-97C6-532923C37621}"/>
+                <a16:creationId xmlns:a16="http://schemas.microsoft.com/office/drawing/2014/main" id="{C4CEEBC2-7866-4416-B797-97E5E762149B}"/>
               </a:ext>
             </a:extLst>
           </p:cNvPr>
@@ -13103,7 +13111,7 @@
           <p:cNvPr id="2" name="">
             <a:extLst xmlns:a="http://schemas.openxmlformats.org/drawingml/2006/main">
               <a:ext uri="{FF2B5EF4-FFF2-40B4-BE49-F238E27FC236}">
-                <a16:creationId xmlns:a16="http://schemas.microsoft.com/office/drawing/2014/main" id="{0A07A220-ECE0-4EA2-A044-FFAD4A2ACDAC}"/>
+                <a16:creationId xmlns:a16="http://schemas.microsoft.com/office/drawing/2014/main" id="{EA8E405D-FD18-4A53-9765-15700EC04C93}"/>
               </a:ext>
             </a:extLst>
           </p:cNvPr>
@@ -13160,7 +13168,7 @@
           <p:cNvPr id="3" name="">
             <a:extLst xmlns:a="http://schemas.openxmlformats.org/drawingml/2006/main">
               <a:ext uri="{FF2B5EF4-FFF2-40B4-BE49-F238E27FC236}">
-                <a16:creationId xmlns:a16="http://schemas.microsoft.com/office/drawing/2014/main" id="{E27A14CB-B004-4C35-865E-F07C56E43B10}"/>
+                <a16:creationId xmlns:a16="http://schemas.microsoft.com/office/drawing/2014/main" id="{1B0028FF-2EEB-4330-85CA-F1F96B40689B}"/>
               </a:ext>
             </a:extLst>
           </p:cNvPr>
@@ -13192,7 +13200,7 @@
           <p:cNvPr id="4" name="">
             <a:extLst xmlns:a="http://schemas.openxmlformats.org/drawingml/2006/main">
               <a:ext uri="{FF2B5EF4-FFF2-40B4-BE49-F238E27FC236}">
-                <a16:creationId xmlns:a16="http://schemas.microsoft.com/office/drawing/2014/main" id="{9BE9E9BA-F849-4C03-937C-42A1B8F6A55B}"/>
+                <a16:creationId xmlns:a16="http://schemas.microsoft.com/office/drawing/2014/main" id="{2EA1E653-29CF-4E4F-B4CD-18584D9204C6}"/>
               </a:ext>
             </a:extLst>
           </p:cNvPr>
@@ -13249,7 +13257,7 @@
           <p:cNvPr id="5" name="">
             <a:extLst xmlns:a="http://schemas.openxmlformats.org/drawingml/2006/main">
               <a:ext uri="{FF2B5EF4-FFF2-40B4-BE49-F238E27FC236}">
-                <a16:creationId xmlns:a16="http://schemas.microsoft.com/office/drawing/2014/main" id="{70689733-B0B8-4195-A100-655A8ADFBDED}"/>
+                <a16:creationId xmlns:a16="http://schemas.microsoft.com/office/drawing/2014/main" id="{3DA863D5-93DB-48B8-B6C2-16118D181FC3}"/>
               </a:ext>
             </a:extLst>
           </p:cNvPr>
@@ -13306,7 +13314,7 @@
           <p:cNvPr id="6" name="">
             <a:extLst xmlns:a="http://schemas.openxmlformats.org/drawingml/2006/main">
               <a:ext uri="{FF2B5EF4-FFF2-40B4-BE49-F238E27FC236}">
-                <a16:creationId xmlns:a16="http://schemas.microsoft.com/office/drawing/2014/main" id="{2B876FFC-64A6-4027-B5A8-FF1F65CB162E}"/>
+                <a16:creationId xmlns:a16="http://schemas.microsoft.com/office/drawing/2014/main" id="{A3184BB3-0E8A-4989-81EA-F01DC32A6F6F}"/>
               </a:ext>
             </a:extLst>
           </p:cNvPr>
@@ -13363,7 +13371,7 @@
           <p:cNvPr id="7" name="">
             <a:extLst xmlns:a="http://schemas.openxmlformats.org/drawingml/2006/main">
               <a:ext uri="{FF2B5EF4-FFF2-40B4-BE49-F238E27FC236}">
-                <a16:creationId xmlns:a16="http://schemas.microsoft.com/office/drawing/2014/main" id="{14DF2710-3A12-4661-8899-EBB74E4D0E1B}"/>
+                <a16:creationId xmlns:a16="http://schemas.microsoft.com/office/drawing/2014/main" id="{F7BB3D5A-D16D-4A30-B569-6671CDDDC5E1}"/>
               </a:ext>
             </a:extLst>
           </p:cNvPr>
@@ -13395,7 +13403,7 @@
           <p:cNvPr id="8" name="">
             <a:extLst xmlns:a="http://schemas.openxmlformats.org/drawingml/2006/main">
               <a:ext uri="{FF2B5EF4-FFF2-40B4-BE49-F238E27FC236}">
-                <a16:creationId xmlns:a16="http://schemas.microsoft.com/office/drawing/2014/main" id="{3F954FB8-2E86-4318-B79D-955F2F927A16}"/>
+                <a16:creationId xmlns:a16="http://schemas.microsoft.com/office/drawing/2014/main" id="{799E99AF-D535-4811-9427-1B4D4F0DF22C}"/>
               </a:ext>
             </a:extLst>
           </p:cNvPr>
@@ -13452,7 +13460,7 @@
           <p:cNvPr id="9" name="">
             <a:extLst xmlns:a="http://schemas.openxmlformats.org/drawingml/2006/main">
               <a:ext uri="{FF2B5EF4-FFF2-40B4-BE49-F238E27FC236}">
-                <a16:creationId xmlns:a16="http://schemas.microsoft.com/office/drawing/2014/main" id="{1FBB440D-4B10-45FF-B22B-0217E0C384FC}"/>
+                <a16:creationId xmlns:a16="http://schemas.microsoft.com/office/drawing/2014/main" id="{412581B1-57B3-4401-AFD2-415172BE3B46}"/>
               </a:ext>
             </a:extLst>
           </p:cNvPr>
@@ -13509,7 +13517,7 @@
           <p:cNvPr id="10" name="">
             <a:extLst xmlns:a="http://schemas.openxmlformats.org/drawingml/2006/main">
               <a:ext uri="{FF2B5EF4-FFF2-40B4-BE49-F238E27FC236}">
-                <a16:creationId xmlns:a16="http://schemas.microsoft.com/office/drawing/2014/main" id="{43680F3C-D5B4-4945-9C03-7DDE595D1553}"/>
+                <a16:creationId xmlns:a16="http://schemas.microsoft.com/office/drawing/2014/main" id="{580C491A-5E3A-4E3E-872E-C532179CBD90}"/>
               </a:ext>
             </a:extLst>
           </p:cNvPr>
@@ -13543,7 +13551,7 @@
           <p:cNvPr id="11" name="">
             <a:extLst xmlns:a="http://schemas.openxmlformats.org/drawingml/2006/main">
               <a:ext uri="{FF2B5EF4-FFF2-40B4-BE49-F238E27FC236}">
-                <a16:creationId xmlns:a16="http://schemas.microsoft.com/office/drawing/2014/main" id="{A4A8661D-52EA-47C1-A01F-C2B037FC7EF9}"/>
+                <a16:creationId xmlns:a16="http://schemas.microsoft.com/office/drawing/2014/main" id="{7784F788-A6B4-4FDC-AF8D-20B230ADCEB2}"/>
               </a:ext>
             </a:extLst>
           </p:cNvPr>
@@ -13575,7 +13583,7 @@
           <p:cNvPr id="12" name="">
             <a:extLst xmlns:a="http://schemas.openxmlformats.org/drawingml/2006/main">
               <a:ext uri="{FF2B5EF4-FFF2-40B4-BE49-F238E27FC236}">
-                <a16:creationId xmlns:a16="http://schemas.microsoft.com/office/drawing/2014/main" id="{C66E7588-AEDE-471B-9708-116E1DF1E102}"/>
+                <a16:creationId xmlns:a16="http://schemas.microsoft.com/office/drawing/2014/main" id="{CC0560B9-31C1-4788-BE07-43FCCE20147E}"/>
               </a:ext>
             </a:extLst>
           </p:cNvPr>
@@ -13632,7 +13640,7 @@
           <p:cNvPr id="13" name="">
             <a:extLst xmlns:a="http://schemas.openxmlformats.org/drawingml/2006/main">
               <a:ext uri="{FF2B5EF4-FFF2-40B4-BE49-F238E27FC236}">
-                <a16:creationId xmlns:a16="http://schemas.microsoft.com/office/drawing/2014/main" id="{9456CD31-7E90-43F2-A6E1-D76C5FEE29AB}"/>
+                <a16:creationId xmlns:a16="http://schemas.microsoft.com/office/drawing/2014/main" id="{9BEAD0B8-9A48-4E68-BCDC-27A6FABC6999}"/>
               </a:ext>
             </a:extLst>
           </p:cNvPr>
@@ -13689,7 +13697,7 @@
           <p:cNvPr id="14" name="">
             <a:extLst xmlns:a="http://schemas.openxmlformats.org/drawingml/2006/main">
               <a:ext uri="{FF2B5EF4-FFF2-40B4-BE49-F238E27FC236}">
-                <a16:creationId xmlns:a16="http://schemas.microsoft.com/office/drawing/2014/main" id="{A142FF1C-56E1-4F58-84D0-833BEFEA333A}"/>
+                <a16:creationId xmlns:a16="http://schemas.microsoft.com/office/drawing/2014/main" id="{D9ABF15C-724C-4E96-AF1B-284B37BE2974}"/>
               </a:ext>
             </a:extLst>
           </p:cNvPr>
@@ -13723,7 +13731,7 @@
           <p:cNvPr id="15" name="">
             <a:extLst xmlns:a="http://schemas.openxmlformats.org/drawingml/2006/main">
               <a:ext uri="{FF2B5EF4-FFF2-40B4-BE49-F238E27FC236}">
-                <a16:creationId xmlns:a16="http://schemas.microsoft.com/office/drawing/2014/main" id="{E8A7E292-E51B-4E42-BF37-DAFBAF2CE603}"/>
+                <a16:creationId xmlns:a16="http://schemas.microsoft.com/office/drawing/2014/main" id="{FAC43564-5F03-44B0-8768-5392EE9F0B3D}"/>
               </a:ext>
             </a:extLst>
           </p:cNvPr>
@@ -13755,7 +13763,7 @@
           <p:cNvPr id="16" name="">
             <a:extLst xmlns:a="http://schemas.openxmlformats.org/drawingml/2006/main">
               <a:ext uri="{FF2B5EF4-FFF2-40B4-BE49-F238E27FC236}">
-                <a16:creationId xmlns:a16="http://schemas.microsoft.com/office/drawing/2014/main" id="{B07691BF-9B37-4D73-8E9D-5B6B3013C62E}"/>
+                <a16:creationId xmlns:a16="http://schemas.microsoft.com/office/drawing/2014/main" id="{44B675C9-E91A-4DCF-9988-FCA88EB7A987}"/>
               </a:ext>
             </a:extLst>
           </p:cNvPr>
@@ -13812,7 +13820,7 @@
           <p:cNvPr id="17" name="">
             <a:extLst xmlns:a="http://schemas.openxmlformats.org/drawingml/2006/main">
               <a:ext uri="{FF2B5EF4-FFF2-40B4-BE49-F238E27FC236}">
-                <a16:creationId xmlns:a16="http://schemas.microsoft.com/office/drawing/2014/main" id="{9A97EDDE-5A60-44FB-90B6-869FAD76FD76}"/>
+                <a16:creationId xmlns:a16="http://schemas.microsoft.com/office/drawing/2014/main" id="{2591BE1F-0707-4CCC-A060-868EF906E7C3}"/>
               </a:ext>
             </a:extLst>
           </p:cNvPr>
@@ -13869,7 +13877,7 @@
           <p:cNvPr id="18" name="">
             <a:extLst xmlns:a="http://schemas.openxmlformats.org/drawingml/2006/main">
               <a:ext uri="{FF2B5EF4-FFF2-40B4-BE49-F238E27FC236}">
-                <a16:creationId xmlns:a16="http://schemas.microsoft.com/office/drawing/2014/main" id="{98D31F67-836D-4406-B515-8A6B77B06C08}"/>
+                <a16:creationId xmlns:a16="http://schemas.microsoft.com/office/drawing/2014/main" id="{4BF35542-BB00-46A5-BE88-ECFC7D2987EC}"/>
               </a:ext>
             </a:extLst>
           </p:cNvPr>
@@ -13903,7 +13911,7 @@
           <p:cNvPr id="19" name="">
             <a:extLst xmlns:a="http://schemas.openxmlformats.org/drawingml/2006/main">
               <a:ext uri="{FF2B5EF4-FFF2-40B4-BE49-F238E27FC236}">
-                <a16:creationId xmlns:a16="http://schemas.microsoft.com/office/drawing/2014/main" id="{D07AC250-AC66-4C6C-B3F9-7524DC38E84E}"/>
+                <a16:creationId xmlns:a16="http://schemas.microsoft.com/office/drawing/2014/main" id="{F0275FEA-DD6A-4639-8D37-083539EAC4FB}"/>
               </a:ext>
             </a:extLst>
           </p:cNvPr>
@@ -13935,7 +13943,7 @@
           <p:cNvPr id="20" name="">
             <a:extLst xmlns:a="http://schemas.openxmlformats.org/drawingml/2006/main">
               <a:ext uri="{FF2B5EF4-FFF2-40B4-BE49-F238E27FC236}">
-                <a16:creationId xmlns:a16="http://schemas.microsoft.com/office/drawing/2014/main" id="{0AECD859-0EA2-4919-914A-2F4522B4887D}"/>
+                <a16:creationId xmlns:a16="http://schemas.microsoft.com/office/drawing/2014/main" id="{0605464B-B71A-4B85-94EA-BA994D66802F}"/>
               </a:ext>
             </a:extLst>
           </p:cNvPr>
@@ -13992,7 +14000,7 @@
           <p:cNvPr id="21" name="">
             <a:extLst xmlns:a="http://schemas.openxmlformats.org/drawingml/2006/main">
               <a:ext uri="{FF2B5EF4-FFF2-40B4-BE49-F238E27FC236}">
-                <a16:creationId xmlns:a16="http://schemas.microsoft.com/office/drawing/2014/main" id="{7D3281E6-11EB-49DC-A68E-D0B06068E701}"/>
+                <a16:creationId xmlns:a16="http://schemas.microsoft.com/office/drawing/2014/main" id="{A0E6D055-2B3F-45BE-B693-515F309C2CAE}"/>
               </a:ext>
             </a:extLst>
           </p:cNvPr>
@@ -14047,7 +14055,7 @@
     </p:spTree>
     <p:extLst>
       <p:ext uri="{BB962C8B-B14F-4D97-AF65-F5344CB8AC3E}">
-        <p14:creationId xmlns:p14="http://schemas.microsoft.com/office/powerpoint/2010/main" val="400142629"/>
+        <p14:creationId xmlns:p14="http://schemas.microsoft.com/office/powerpoint/2010/main" val="1311840424"/>
       </p:ext>
     </p:extLst>
   </p:cSld>
